--- a/docs/deck/croesus-session-deck.pptx
+++ b/docs/deck/croesus-session-deck.pptx
@@ -18,6 +18,7 @@
     <p:sldId id="266" r:id="rId18"/>
     <p:sldId id="267" r:id="rId19"/>
     <p:sldId id="268" r:id="rId20"/>
+    <p:sldId id="269" r:id="rId21"/>
   </p:sldIdLst>
   <p:sldSz cx="12191695" cy="6858000" type="screen4x3"/>
   <p:notesSz cx="6858000" cy="9144000"/>
@@ -584,7 +585,7 @@
           <a:lstStyle/>
           <a:p>
             <a:r>
-              <a:t>The point: every branch has a small, reversible fix. Nobody needs a re-architecture, and Desjardins does not need to weaken CA.</a:t>
+              <a:t>Stress the redaction rule up front. It is what makes Q7 answerable by a security-conscious vendor.</a:t>
             </a:r>
           </a:p>
         </p:txBody>
@@ -654,7 +655,7 @@
           <a:lstStyle/>
           <a:p>
             <a:r>
-              <a:t>Demo order: sign in, Call API, show the evidence panel, then the replay button, then scroll to the registration-fork panel and click through to Q7/Q8.</a:t>
+              <a:t>The point: every branch has a small, reversible fix. Nobody needs a re-architecture, and Desjardins does not need to weaken CA.</a:t>
             </a:r>
           </a:p>
         </p:txBody>
@@ -724,7 +725,7 @@
           <a:lstStyle/>
           <a:p>
             <a:r>
-              <a:t>Close by restating the guardrail. It protects both parties: no premature policy loosening, no premature vendor re-architecture.</a:t>
+              <a:t>Demo order: sign in, Call API, show the evidence panel, then the replay button, then scroll to the registration-fork panel and click through to Q7/Q8.</a:t>
             </a:r>
           </a:p>
         </p:txBody>
@@ -794,6 +795,76 @@
           <a:lstStyle/>
           <a:p>
             <a:r>
+              <a:t>Close by restating the guardrail. It protects both parties: no premature policy loosening, no premature vendor re-architecture.</a:t>
+            </a:r>
+          </a:p>
+        </p:txBody>
+      </p:sp>
+      <p:sp>
+        <p:nvSpPr>
+          <p:cNvPr id="4" name="Slide Number Placeholder 3"/>
+          <p:cNvSpPr>
+            <a:spLocks noGrp="1"/>
+          </p:cNvSpPr>
+          <p:nvPr>
+            <p:ph type="sldNum" idx="5" sz="quarter"/>
+          </p:nvPr>
+        </p:nvSpPr>
+        <p:spPr/>
+      </p:sp>
+    </p:spTree>
+  </p:cSld>
+  <p:clrMapOvr>
+    <a:masterClrMapping/>
+  </p:clrMapOvr>
+</p:notes>
+</file>
+
+<file path=ppt/notesSlides/notesSlide14.xml><?xml version="1.0" encoding="utf-8"?>
+<p:notes xmlns:a="http://schemas.openxmlformats.org/drawingml/2006/main" xmlns:p="http://schemas.openxmlformats.org/presentationml/2006/main" xmlns:r="http://schemas.openxmlformats.org/officeDocument/2006/relationships">
+  <p:cSld>
+    <p:spTree>
+      <p:nvGrpSpPr>
+        <p:cNvPr id="1" name=""/>
+        <p:cNvGrpSpPr/>
+        <p:nvPr/>
+      </p:nvGrpSpPr>
+      <p:grpSpPr>
+        <a:xfrm>
+          <a:off x="0" y="0"/>
+          <a:ext cx="0" cy="0"/>
+          <a:chOff x="0" y="0"/>
+          <a:chExt cx="0" cy="0"/>
+        </a:xfrm>
+      </p:grpSpPr>
+      <p:sp>
+        <p:nvSpPr>
+          <p:cNvPr id="2" name="Slide Image Placeholder 1"/>
+          <p:cNvSpPr>
+            <a:spLocks noGrp="1"/>
+          </p:cNvSpPr>
+          <p:nvPr>
+            <p:ph type="sldImg" idx="2"/>
+          </p:nvPr>
+        </p:nvSpPr>
+        <p:spPr/>
+      </p:sp>
+      <p:sp>
+        <p:nvSpPr>
+          <p:cNvPr id="3" name="Notes Placeholder 2"/>
+          <p:cNvSpPr>
+            <a:spLocks noGrp="1"/>
+          </p:cNvSpPr>
+          <p:nvPr>
+            <p:ph type="body" idx="3" sz="quarter"/>
+          </p:nvPr>
+        </p:nvSpPr>
+        <p:spPr/>
+        <p:txBody>
+          <a:bodyPr/>
+          <a:lstStyle/>
+          <a:p>
+            <a:r>
               <a:t>Share the deck itself — every link is clickable in slideshow mode.</a:t>
             </a:r>
           </a:p>
@@ -1284,7 +1355,7 @@
           <a:lstStyle/>
           <a:p>
             <a:r>
-              <a:t>The raw Origin header is never a field in the tenant sign-in logs. It exists only on the HTTP request the caller sends to Entra.</a:t>
+              <a:t>The panel renders without signing in, so it can be walked through on screen share. Q7, Q8, and the full question list are clickable straight from the page.</a:t>
             </a:r>
           </a:p>
         </p:txBody>
@@ -1354,7 +1425,7 @@
           <a:lstStyle/>
           <a:p>
             <a:r>
-              <a:t>Stress the redaction rule up front. It is what makes Q7 answerable by a security-conscious vendor.</a:t>
+              <a:t>The raw Origin header is never a field in the tenant sign-in logs. It exists only on the HTTP request the caller sends to Entra.</a:t>
             </a:r>
           </a:p>
         </p:txBody>
@@ -4705,7 +4776,7 @@
                 </a:solidFill>
                 <a:latin typeface="Segoe UI"/>
               </a:rPr>
-              <a:t>ONCE THE FORK IS RESOLVED</a:t>
+              <a:t>WHAT WE NEED FROM CROESUS</a:t>
             </a:r>
           </a:p>
         </p:txBody>
@@ -4740,7 +4811,7 @@
                 </a:solidFill>
                 <a:latin typeface="Segoe UI"/>
               </a:rPr>
-              <a:t>Remediation ladder</a:t>
+              <a:t>The asks: Q7 and Q8</a:t>
             </a:r>
           </a:p>
         </p:txBody>
@@ -4791,14 +4862,102 @@
       </p:sp>
       <p:sp>
         <p:nvSpPr>
-          <p:cNvPr id="5" name="TextBox 4"/>
+          <p:cNvPr id="5" name="Rounded Rectangle 4"/>
+          <p:cNvSpPr/>
+          <p:nvPr/>
+        </p:nvSpPr>
+        <p:spPr>
+          <a:xfrm>
+            <a:off x="685800" y="1874519"/>
+            <a:ext cx="5257800" cy="3108960"/>
+          </a:xfrm>
+          <a:prstGeom prst="roundRect">
+            <a:avLst/>
+          </a:prstGeom>
+          <a:solidFill>
+            <a:srgbClr val="FFFFFF"/>
+          </a:solidFill>
+          <a:ln>
+            <a:solidFill>
+              <a:srgbClr val="E1E5E8"/>
+            </a:solidFill>
+          </a:ln>
+          <a:effectLst/>
+        </p:spPr>
+        <p:style>
+          <a:lnRef idx="1">
+            <a:schemeClr val="accent1"/>
+          </a:lnRef>
+          <a:fillRef idx="3">
+            <a:schemeClr val="accent1"/>
+          </a:fillRef>
+          <a:effectRef idx="2">
+            <a:schemeClr val="accent1"/>
+          </a:effectRef>
+          <a:fontRef idx="minor">
+            <a:schemeClr val="lt1"/>
+          </a:fontRef>
+        </p:style>
+        <p:txBody>
+          <a:bodyPr rtlCol="0" anchor="ctr"/>
+          <a:lstStyle/>
+          <a:p/>
+        </p:txBody>
+      </p:sp>
+      <p:sp>
+        <p:nvSpPr>
+          <p:cNvPr id="6" name="Rectangle 5"/>
+          <p:cNvSpPr/>
+          <p:nvPr/>
+        </p:nvSpPr>
+        <p:spPr>
+          <a:xfrm>
+            <a:off x="685800" y="1874519"/>
+            <a:ext cx="5257800" cy="63500"/>
+          </a:xfrm>
+          <a:prstGeom prst="rect">
+            <a:avLst/>
+          </a:prstGeom>
+          <a:solidFill>
+            <a:srgbClr val="0067C0"/>
+          </a:solidFill>
+          <a:ln>
+            <a:noFill/>
+          </a:ln>
+          <a:effectLst/>
+        </p:spPr>
+        <p:style>
+          <a:lnRef idx="1">
+            <a:schemeClr val="accent1"/>
+          </a:lnRef>
+          <a:fillRef idx="3">
+            <a:schemeClr val="accent1"/>
+          </a:fillRef>
+          <a:effectRef idx="2">
+            <a:schemeClr val="accent1"/>
+          </a:effectRef>
+          <a:fontRef idx="minor">
+            <a:schemeClr val="lt1"/>
+          </a:fontRef>
+        </p:style>
+        <p:txBody>
+          <a:bodyPr rtlCol="0" anchor="ctr"/>
+          <a:lstStyle/>
+          <a:p>
+            <a:pPr algn="ctr"/>
+          </a:p>
+        </p:txBody>
+      </p:sp>
+      <p:sp>
+        <p:nvSpPr>
+          <p:cNvPr id="7" name="TextBox 6"/>
           <p:cNvSpPr txBox="1"/>
           <p:nvPr/>
         </p:nvSpPr>
         <p:spPr>
           <a:xfrm>
-            <a:off x="685800" y="1920240"/>
-            <a:ext cx="10789920" cy="4206240"/>
+            <a:off x="914400" y="2075688"/>
+            <a:ext cx="4800600" cy="457200"/>
           </a:xfrm>
           <a:prstGeom prst="rect">
             <a:avLst/>
@@ -4811,173 +4970,347 @@
           </a:bodyPr>
           <a:lstStyle/>
           <a:p>
+            <a:pPr algn="l"/>
+            <a:r>
+              <a:rPr sz="1700" b="1" i="0">
+                <a:solidFill>
+                  <a:srgbClr val="0067C0"/>
+                </a:solidFill>
+                <a:latin typeface="Segoe UI"/>
+              </a:rPr>
+              <a:t>Q7 — one redacted /token capture</a:t>
+            </a:r>
+          </a:p>
+        </p:txBody>
+      </p:sp>
+      <p:sp>
+        <p:nvSpPr>
+          <p:cNvPr id="8" name="TextBox 7"/>
+          <p:cNvSpPr txBox="1"/>
+          <p:nvPr/>
+        </p:nvSpPr>
+        <p:spPr>
+          <a:xfrm>
+            <a:off x="914400" y="2651760"/>
+            <a:ext cx="4800600" cy="2148839"/>
+          </a:xfrm>
+          <a:prstGeom prst="rect">
+            <a:avLst/>
+          </a:prstGeom>
+          <a:noFill/>
+        </p:spPr>
+        <p:txBody>
+          <a:bodyPr wrap="square">
+            <a:spAutoFit/>
+          </a:bodyPr>
+          <a:lstStyle/>
+          <a:p>
             <a:pPr>
               <a:spcAft>
-                <a:spcPts val="1400"/>
+                <a:spcPts val="800"/>
               </a:spcAft>
             </a:pPr>
             <a:r>
-              <a:rPr sz="1700">
-                <a:solidFill>
-                  <a:srgbClr val="0067C0"/>
-                </a:solidFill>
-                <a:latin typeface="Segoe UI"/>
-              </a:rPr>
-              <a:t>▪  </a:t>
-            </a:r>
-            <a:r>
-              <a:rPr sz="1700" b="1">
+              <a:rPr sz="1400" b="1">
                 <a:solidFill>
                   <a:srgbClr val="1A1A1A"/>
                 </a:solidFill>
                 <a:latin typeface="Segoe UI"/>
               </a:rPr>
-              <a:t>Classify first.</a:t>
-            </a:r>
-            <a:r>
-              <a:rPr sz="1700" b="0">
-                <a:solidFill>
-                  <a:srgbClr val="1A1A1A"/>
-                </a:solidFill>
-                <a:latin typeface="Segoe UI"/>
-              </a:rPr>
-              <a:t> No Conditional Access change, no AWS IP allowlist, and no OBO mandate until the grant is known.</a:t>
+              <a:t>For one successful and one failing transaction:</a:t>
             </a:r>
           </a:p>
           <a:p>
             <a:pPr>
               <a:spcAft>
-                <a:spcPts val="1400"/>
+                <a:spcPts val="800"/>
               </a:spcAft>
             </a:pPr>
             <a:r>
-              <a:rPr sz="1700">
-                <a:solidFill>
-                  <a:srgbClr val="0067C0"/>
-                </a:solidFill>
-                <a:latin typeface="Segoe UI"/>
-              </a:rPr>
-              <a:t>▪  </a:t>
-            </a:r>
-            <a:r>
-              <a:rPr sz="1700" b="1">
+              <a:rPr sz="1400" b="0">
                 <a:solidFill>
                   <a:srgbClr val="1A1A1A"/>
                 </a:solidFill>
                 <a:latin typeface="Segoe UI"/>
               </a:rPr>
-              <a:t>Branch A → register a web confidential client.</a:t>
-            </a:r>
-            <a:r>
-              <a:rPr sz="1700" b="0">
-                <a:solidFill>
-                  <a:srgbClr val="1A1A1A"/>
-                </a:solidFill>
-                <a:latin typeface="Segoe UI"/>
-              </a:rPr>
-              <a:t> A certificate credential on the Croesus side. Smallest possible change; no Desjardins policy change needed.</a:t>
+              <a:t>Is an Origin header present?  •  grant_type  •  client_id  •  redirect URI  •  client-authentication method</a:t>
             </a:r>
           </a:p>
           <a:p>
             <a:pPr>
               <a:spcAft>
-                <a:spcPts val="1400"/>
+                <a:spcPts val="800"/>
               </a:spcAft>
             </a:pPr>
             <a:r>
-              <a:rPr sz="1700">
+              <a:rPr sz="1400" b="1">
+                <a:solidFill>
+                  <a:srgbClr val="1A1A1A"/>
+                </a:solidFill>
+                <a:latin typeface="Segoe UI"/>
+              </a:rPr>
+              <a:t>Presence indicators or SHA-256 hashes only. Never raw codes, tokens, secrets, or assertions.</a:t>
+            </a:r>
+          </a:p>
+        </p:txBody>
+      </p:sp>
+      <p:sp>
+        <p:nvSpPr>
+          <p:cNvPr id="9" name="Rounded Rectangle 8"/>
+          <p:cNvSpPr/>
+          <p:nvPr/>
+        </p:nvSpPr>
+        <p:spPr>
+          <a:xfrm>
+            <a:off x="6263640" y="1874519"/>
+            <a:ext cx="5257800" cy="3108960"/>
+          </a:xfrm>
+          <a:prstGeom prst="roundRect">
+            <a:avLst/>
+          </a:prstGeom>
+          <a:solidFill>
+            <a:srgbClr val="FFFFFF"/>
+          </a:solidFill>
+          <a:ln>
+            <a:solidFill>
+              <a:srgbClr val="E1E5E8"/>
+            </a:solidFill>
+          </a:ln>
+          <a:effectLst/>
+        </p:spPr>
+        <p:style>
+          <a:lnRef idx="1">
+            <a:schemeClr val="accent1"/>
+          </a:lnRef>
+          <a:fillRef idx="3">
+            <a:schemeClr val="accent1"/>
+          </a:fillRef>
+          <a:effectRef idx="2">
+            <a:schemeClr val="accent1"/>
+          </a:effectRef>
+          <a:fontRef idx="minor">
+            <a:schemeClr val="lt1"/>
+          </a:fontRef>
+        </p:style>
+        <p:txBody>
+          <a:bodyPr rtlCol="0" anchor="ctr"/>
+          <a:lstStyle/>
+          <a:p/>
+        </p:txBody>
+      </p:sp>
+      <p:sp>
+        <p:nvSpPr>
+          <p:cNvPr id="10" name="Rectangle 9"/>
+          <p:cNvSpPr/>
+          <p:nvPr/>
+        </p:nvSpPr>
+        <p:spPr>
+          <a:xfrm>
+            <a:off x="6263640" y="1874519"/>
+            <a:ext cx="5257800" cy="63500"/>
+          </a:xfrm>
+          <a:prstGeom prst="rect">
+            <a:avLst/>
+          </a:prstGeom>
+          <a:solidFill>
+            <a:srgbClr val="0067C0"/>
+          </a:solidFill>
+          <a:ln>
+            <a:noFill/>
+          </a:ln>
+          <a:effectLst/>
+        </p:spPr>
+        <p:style>
+          <a:lnRef idx="1">
+            <a:schemeClr val="accent1"/>
+          </a:lnRef>
+          <a:fillRef idx="3">
+            <a:schemeClr val="accent1"/>
+          </a:fillRef>
+          <a:effectRef idx="2">
+            <a:schemeClr val="accent1"/>
+          </a:effectRef>
+          <a:fontRef idx="minor">
+            <a:schemeClr val="lt1"/>
+          </a:fontRef>
+        </p:style>
+        <p:txBody>
+          <a:bodyPr rtlCol="0" anchor="ctr"/>
+          <a:lstStyle/>
+          <a:p>
+            <a:pPr algn="ctr"/>
+          </a:p>
+        </p:txBody>
+      </p:sp>
+      <p:sp>
+        <p:nvSpPr>
+          <p:cNvPr id="11" name="TextBox 10"/>
+          <p:cNvSpPr txBox="1"/>
+          <p:nvPr/>
+        </p:nvSpPr>
+        <p:spPr>
+          <a:xfrm>
+            <a:off x="6492240" y="2075688"/>
+            <a:ext cx="4800600" cy="457200"/>
+          </a:xfrm>
+          <a:prstGeom prst="rect">
+            <a:avLst/>
+          </a:prstGeom>
+          <a:noFill/>
+        </p:spPr>
+        <p:txBody>
+          <a:bodyPr wrap="square">
+            <a:spAutoFit/>
+          </a:bodyPr>
+          <a:lstStyle/>
+          <a:p>
+            <a:pPr algn="l"/>
+            <a:r>
+              <a:rPr sz="1700" b="1" i="0">
                 <a:solidFill>
                   <a:srgbClr val="0067C0"/>
                 </a:solidFill>
                 <a:latin typeface="Segoe UI"/>
               </a:rPr>
-              <a:t>▪  </a:t>
-            </a:r>
-            <a:r>
-              <a:rPr sz="1700" b="1">
-                <a:solidFill>
-                  <a:srgbClr val="1A1A1A"/>
-                </a:solidFill>
-                <a:latin typeface="Segoe UI"/>
-              </a:rPr>
-              <a:t>Branch B → scope to the disclosed registration.</a:t>
-            </a:r>
-            <a:r>
-              <a:rPr sz="1700" b="0">
-                <a:solidFill>
-                  <a:srgbClr val="1A1A1A"/>
-                </a:solidFill>
-                <a:latin typeface="Segoe UI"/>
-              </a:rPr>
-              <a:t> Apply any accommodation to that specific service principal rather than to a broad IP range.</a:t>
-            </a:r>
-          </a:p>
+              <a:t>Q8 — complete registration inventory</a:t>
+            </a:r>
+          </a:p>
+        </p:txBody>
+      </p:sp>
+      <p:sp>
+        <p:nvSpPr>
+          <p:cNvPr id="12" name="TextBox 11"/>
+          <p:cNvSpPr txBox="1"/>
+          <p:nvPr/>
+        </p:nvSpPr>
+        <p:spPr>
+          <a:xfrm>
+            <a:off x="6492240" y="2651760"/>
+            <a:ext cx="4800600" cy="2148839"/>
+          </a:xfrm>
+          <a:prstGeom prst="rect">
+            <a:avLst/>
+          </a:prstGeom>
+          <a:noFill/>
+        </p:spPr>
+        <p:txBody>
+          <a:bodyPr wrap="square">
+            <a:spAutoFit/>
+          </a:bodyPr>
+          <a:lstStyle/>
           <a:p>
             <a:pPr>
               <a:spcAft>
-                <a:spcPts val="1400"/>
+                <a:spcPts val="800"/>
               </a:spcAft>
             </a:pPr>
             <a:r>
-              <a:rPr sz="1700">
-                <a:solidFill>
-                  <a:srgbClr val="0067C0"/>
-                </a:solidFill>
-                <a:latin typeface="Segoe UI"/>
-              </a:rPr>
-              <a:t>▪  </a:t>
-            </a:r>
-            <a:r>
-              <a:rPr sz="1700" b="1">
+              <a:rPr sz="1400" b="1">
                 <a:solidFill>
                   <a:srgbClr val="1A1A1A"/>
                 </a:solidFill>
                 <a:latin typeface="Segoe UI"/>
               </a:rPr>
-              <a:t>Prefer B2B ‘Trust compliant devices’ over a broad CA exception.</a:t>
-            </a:r>
-            <a:r>
-              <a:rPr sz="1700" b="0">
-                <a:solidFill>
-                  <a:srgbClr val="1A1A1A"/>
-                </a:solidFill>
-                <a:latin typeface="Segoe UI"/>
-              </a:rPr>
-              <a:t> It preserves the device-compliance signal instead of discarding it.</a:t>
+              <a:t>Every app registration and service principal GPD Central uses, across environments.</a:t>
             </a:r>
           </a:p>
           <a:p>
             <a:pPr>
               <a:spcAft>
-                <a:spcPts val="1400"/>
+                <a:spcPts val="800"/>
               </a:spcAft>
             </a:pPr>
             <a:r>
-              <a:rPr sz="1700">
-                <a:solidFill>
-                  <a:srgbClr val="0067C0"/>
-                </a:solidFill>
-                <a:latin typeface="Segoe UI"/>
-              </a:rPr>
-              <a:t>▪  </a:t>
-            </a:r>
+              <a:rPr sz="1400" b="0">
+                <a:solidFill>
+                  <a:srgbClr val="1A1A1A"/>
+                </a:solidFill>
+                <a:latin typeface="Segoe UI"/>
+              </a:rPr>
+              <a:t>Including any confidential web/API registration that is not among the three spa exports we hold.</a:t>
+            </a:r>
+          </a:p>
+          <a:p>
+            <a:pPr>
+              <a:spcAft>
+                <a:spcPts val="800"/>
+              </a:spcAft>
+            </a:pPr>
+            <a:r>
+              <a:rPr sz="1400" b="1">
+                <a:solidFill>
+                  <a:srgbClr val="1A1A1A"/>
+                </a:solidFill>
+                <a:latin typeface="Segoe UI"/>
+              </a:rPr>
+              <a:t>Promoted to equal priority by the server-side finding.</a:t>
+            </a:r>
+          </a:p>
+        </p:txBody>
+      </p:sp>
+      <p:sp>
+        <p:nvSpPr>
+          <p:cNvPr id="13" name="TextBox 12"/>
+          <p:cNvSpPr txBox="1"/>
+          <p:nvPr/>
+        </p:nvSpPr>
+        <p:spPr>
+          <a:xfrm>
+            <a:off x="685800" y="5166360"/>
+            <a:ext cx="10789920" cy="457200"/>
+          </a:xfrm>
+          <a:prstGeom prst="rect">
+            <a:avLst/>
+          </a:prstGeom>
+          <a:noFill/>
+        </p:spPr>
+        <p:txBody>
+          <a:bodyPr wrap="square">
+            <a:spAutoFit/>
+          </a:bodyPr>
+          <a:lstStyle/>
+          <a:p>
+            <a:pPr algn="l"/>
+            <a:r>
+              <a:rPr sz="1500" b="0" i="0">
+                <a:solidFill>
+                  <a:srgbClr val="565656"/>
+                </a:solidFill>
+                <a:latin typeface="Segoe UI"/>
+              </a:rPr>
+              <a:t>Also open: Q1 intended flow  •  Q4 AWS egress ranges  •  Q5 cross-tenant device compliance  •  Q6 token-binding compatibility  •  Q9 Central vs Conseiller parity</a:t>
+            </a:r>
+          </a:p>
+        </p:txBody>
+      </p:sp>
+      <p:sp>
+        <p:nvSpPr>
+          <p:cNvPr id="14" name="TextBox 13"/>
+          <p:cNvSpPr txBox="1"/>
+          <p:nvPr/>
+        </p:nvSpPr>
+        <p:spPr>
+          <a:xfrm>
+            <a:off x="685800" y="5715000"/>
+            <a:ext cx="7315200" cy="411480"/>
+          </a:xfrm>
+          <a:prstGeom prst="rect">
+            <a:avLst/>
+          </a:prstGeom>
+          <a:noFill/>
+        </p:spPr>
+        <p:txBody>
+          <a:bodyPr wrap="square">
+            <a:spAutoFit/>
+          </a:bodyPr>
+          <a:lstStyle/>
+          <a:p>
             <a:r>
               <a:rPr sz="1700" b="1">
-                <a:solidFill>
-                  <a:srgbClr val="1A1A1A"/>
-                </a:solidFill>
-                <a:latin typeface="Segoe UI"/>
-              </a:rPr>
-              <a:t>On-Behalf-Of is an option, not a requirement.</a:t>
-            </a:r>
-            <a:r>
-              <a:rPr sz="1700" b="0">
-                <a:solidFill>
-                  <a:srgbClr val="1A1A1A"/>
-                </a:solidFill>
-                <a:latin typeface="Segoe UI"/>
-              </a:rPr>
-              <a:t> It applies only if a genuine confidential middle tier is proven — which requires an exposed API scope and a credential.</a:t>
+                <a:latin typeface="Segoe UI"/>
+                <a:hlinkClick r:id="rId2"/>
+              </a:rPr>
+              <a:t>▶  Full question list Q1–Q9 on GitHub →</a:t>
             </a:r>
           </a:p>
         </p:txBody>
@@ -5038,7 +5371,7 @@
                 </a:solidFill>
                 <a:latin typeface="Segoe UI"/>
               </a:rPr>
-              <a:t>REFERENCE IMPLEMENTATION</a:t>
+              <a:t>ONCE THE FORK IS RESOLVED</a:t>
             </a:r>
           </a:p>
         </p:txBody>
@@ -5073,7 +5406,7 @@
                 </a:solidFill>
                 <a:latin typeface="Segoe UI"/>
               </a:rPr>
-              <a:t>The working demo</a:t>
+              <a:t>Remediation ladder</a:t>
             </a:r>
           </a:p>
         </p:txBody>
@@ -5130,7 +5463,7 @@
         </p:nvSpPr>
         <p:spPr>
           <a:xfrm>
-            <a:off x="685800" y="1874519"/>
+            <a:off x="685800" y="1920240"/>
             <a:ext cx="10789920" cy="4206240"/>
           </a:xfrm>
           <a:prstGeom prst="rect">
@@ -5146,11 +5479,11 @@
           <a:p>
             <a:pPr>
               <a:spcAft>
-                <a:spcPts val="1200"/>
+                <a:spcPts val="1400"/>
               </a:spcAft>
             </a:pPr>
             <a:r>
-              <a:rPr sz="1600">
+              <a:rPr sz="1700">
                 <a:solidFill>
                   <a:srgbClr val="0067C0"/>
                 </a:solidFill>
@@ -5159,23 +5492,32 @@
               <a:t>▪  </a:t>
             </a:r>
             <a:r>
-              <a:rPr sz="1600" b="0">
+              <a:rPr sz="1700" b="1">
                 <a:solidFill>
                   <a:srgbClr val="1A1A1A"/>
                 </a:solidFill>
                 <a:latin typeface="Segoe UI"/>
               </a:rPr>
-              <a:t>A live SPA + API in a Microsoft demo tenant that makes the flow shapes observable — nothing runs against Desjardins or Croesus tenants.</a:t>
+              <a:t>Classify first.</a:t>
+            </a:r>
+            <a:r>
+              <a:rPr sz="1700" b="0">
+                <a:solidFill>
+                  <a:srgbClr val="1A1A1A"/>
+                </a:solidFill>
+                <a:latin typeface="Segoe UI"/>
+              </a:rPr>
+              <a:t> No Conditional Access change, no AWS IP allowlist, and no OBO mandate until the grant is known.</a:t>
             </a:r>
           </a:p>
           <a:p>
             <a:pPr>
               <a:spcAft>
-                <a:spcPts val="1200"/>
+                <a:spcPts val="1400"/>
               </a:spcAft>
             </a:pPr>
             <a:r>
-              <a:rPr sz="1600">
+              <a:rPr sz="1700">
                 <a:solidFill>
                   <a:srgbClr val="0067C0"/>
                 </a:solidFill>
@@ -5184,32 +5526,32 @@
               <a:t>▪  </a:t>
             </a:r>
             <a:r>
-              <a:rPr sz="1600" b="1">
+              <a:rPr sz="1700" b="1">
                 <a:solidFill>
                   <a:srgbClr val="1A1A1A"/>
                 </a:solidFill>
                 <a:latin typeface="Segoe UI"/>
               </a:rPr>
-              <a:t>Wrong vs right:</a:t>
-            </a:r>
-            <a:r>
-              <a:rPr sz="1600" b="0">
+              <a:t>Branch A → register a web confidential client.</a:t>
+            </a:r>
+            <a:r>
+              <a:rPr sz="1700" b="0">
                 <a:solidFill>
                   <a:srgbClr val="1A1A1A"/>
                 </a:solidFill>
                 <a:latin typeface="Segoe UI"/>
               </a:rPr>
-              <a:t> a token replay to Microsoft Graph is rejected on audience, while a real On-Behalf-Of exchange issues a distinct, separately audienced token.</a:t>
+              <a:t> A certificate credential on the Croesus side. Smallest possible change; no Desjardins policy change needed.</a:t>
             </a:r>
           </a:p>
           <a:p>
             <a:pPr>
               <a:spcAft>
-                <a:spcPts val="1200"/>
+                <a:spcPts val="1400"/>
               </a:spcAft>
             </a:pPr>
             <a:r>
-              <a:rPr sz="1600">
+              <a:rPr sz="1700">
                 <a:solidFill>
                   <a:srgbClr val="0067C0"/>
                 </a:solidFill>
@@ -5218,32 +5560,32 @@
               <a:t>▪  </a:t>
             </a:r>
             <a:r>
-              <a:rPr sz="1600" b="1">
+              <a:rPr sz="1700" b="1">
                 <a:solidFill>
                   <a:srgbClr val="1A1A1A"/>
                 </a:solidFill>
                 <a:latin typeface="Segoe UI"/>
               </a:rPr>
-              <a:t>The registration fork:</a:t>
-            </a:r>
-            <a:r>
-              <a:rPr sz="1600" b="0">
+              <a:t>Branch B → scope to the disclosed registration.</a:t>
+            </a:r>
+            <a:r>
+              <a:rPr sz="1700" b="0">
                 <a:solidFill>
                   <a:srgbClr val="1A1A1A"/>
                 </a:solidFill>
                 <a:latin typeface="Segoe UI"/>
               </a:rPr>
-              <a:t> a panel walks through spa vs web and the AADSTS9002327 behaviour, with direct links to Q7 and Q8.</a:t>
+              <a:t> Apply any accommodation to that specific service principal rather than to a broad IP range.</a:t>
             </a:r>
           </a:p>
           <a:p>
             <a:pPr>
               <a:spcAft>
-                <a:spcPts val="1200"/>
+                <a:spcPts val="1400"/>
               </a:spcAft>
             </a:pPr>
             <a:r>
-              <a:rPr sz="1600">
+              <a:rPr sz="1700">
                 <a:solidFill>
                   <a:srgbClr val="0067C0"/>
                 </a:solidFill>
@@ -5252,32 +5594,32 @@
               <a:t>▪  </a:t>
             </a:r>
             <a:r>
-              <a:rPr sz="1600" b="1">
+              <a:rPr sz="1700" b="1">
                 <a:solidFill>
                   <a:srgbClr val="1A1A1A"/>
                 </a:solidFill>
                 <a:latin typeface="Segoe UI"/>
               </a:rPr>
-              <a:t>Token inspector and evidence panel:</a:t>
-            </a:r>
-            <a:r>
-              <a:rPr sz="1600" b="0">
+              <a:t>Prefer B2B ‘Trust compliant devices’ over a broad CA exception.</a:t>
+            </a:r>
+            <a:r>
+              <a:rPr sz="1700" b="0">
                 <a:solidFill>
                   <a:srgbClr val="1A1A1A"/>
                 </a:solidFill>
                 <a:latin typeface="Segoe UI"/>
               </a:rPr>
-              <a:t> decoded claims show audience binding rather than a reused bearer.</a:t>
+              <a:t> It preserves the device-compliance signal instead of discarding it.</a:t>
             </a:r>
           </a:p>
           <a:p>
             <a:pPr>
               <a:spcAft>
-                <a:spcPts val="1200"/>
+                <a:spcPts val="1400"/>
               </a:spcAft>
             </a:pPr>
             <a:r>
-              <a:rPr sz="1600">
+              <a:rPr sz="1700">
                 <a:solidFill>
                   <a:srgbClr val="0067C0"/>
                 </a:solidFill>
@@ -5286,150 +5628,22 @@
               <a:t>▪  </a:t>
             </a:r>
             <a:r>
-              <a:rPr sz="1600" b="1">
+              <a:rPr sz="1700" b="1">
                 <a:solidFill>
                   <a:srgbClr val="1A1A1A"/>
                 </a:solidFill>
                 <a:latin typeface="Segoe UI"/>
               </a:rPr>
-              <a:t>Tier 2 exhibits (gated):</a:t>
-            </a:r>
-            <a:r>
-              <a:rPr sz="1600" b="0">
+              <a:t>On-Behalf-Of is an option, not a requirement.</a:t>
+            </a:r>
+            <a:r>
+              <a:rPr sz="1700" b="0">
                 <a:solidFill>
                   <a:srgbClr val="1A1A1A"/>
                 </a:solidFill>
                 <a:latin typeface="Segoe UI"/>
               </a:rPr>
-              <a:t> a server-side replay control, and a report-only Token Protection policy that reproduces the real 1008 signal on a supported resource.</a:t>
-            </a:r>
-          </a:p>
-        </p:txBody>
-      </p:sp>
-      <p:sp>
-        <p:nvSpPr>
-          <p:cNvPr id="6" name="TextBox 5"/>
-          <p:cNvSpPr txBox="1"/>
-          <p:nvPr/>
-        </p:nvSpPr>
-        <p:spPr>
-          <a:xfrm>
-            <a:off x="685800" y="5440680"/>
-            <a:ext cx="5943600" cy="365760"/>
-          </a:xfrm>
-          <a:prstGeom prst="rect">
-            <a:avLst/>
-          </a:prstGeom>
-          <a:noFill/>
-        </p:spPr>
-        <p:txBody>
-          <a:bodyPr wrap="square">
-            <a:spAutoFit/>
-          </a:bodyPr>
-          <a:lstStyle/>
-          <a:p>
-            <a:r>
-              <a:rPr sz="1600" b="1">
-                <a:latin typeface="Segoe UI"/>
-                <a:hlinkClick r:id="rId2"/>
-              </a:rPr>
-              <a:t>▶  Open the demo — croesus-spa.azurewebsites.net</a:t>
-            </a:r>
-          </a:p>
-        </p:txBody>
-      </p:sp>
-      <p:sp>
-        <p:nvSpPr>
-          <p:cNvPr id="7" name="TextBox 6"/>
-          <p:cNvSpPr txBox="1"/>
-          <p:nvPr/>
-        </p:nvSpPr>
-        <p:spPr>
-          <a:xfrm>
-            <a:off x="685800" y="5852160"/>
-            <a:ext cx="5943600" cy="365760"/>
-          </a:xfrm>
-          <a:prstGeom prst="rect">
-            <a:avLst/>
-          </a:prstGeom>
-          <a:noFill/>
-        </p:spPr>
-        <p:txBody>
-          <a:bodyPr wrap="square">
-            <a:spAutoFit/>
-          </a:bodyPr>
-          <a:lstStyle/>
-          <a:p>
-            <a:r>
-              <a:rPr sz="1600" b="1">
-                <a:latin typeface="Segoe UI"/>
-                <a:hlinkClick r:id="rId3"/>
-              </a:rPr>
-              <a:t>▶  Demo walkthrough guide</a:t>
-            </a:r>
-          </a:p>
-        </p:txBody>
-      </p:sp>
-      <p:sp>
-        <p:nvSpPr>
-          <p:cNvPr id="8" name="TextBox 7"/>
-          <p:cNvSpPr txBox="1"/>
-          <p:nvPr/>
-        </p:nvSpPr>
-        <p:spPr>
-          <a:xfrm>
-            <a:off x="6766560" y="5440680"/>
-            <a:ext cx="4754880" cy="365760"/>
-          </a:xfrm>
-          <a:prstGeom prst="rect">
-            <a:avLst/>
-          </a:prstGeom>
-          <a:noFill/>
-        </p:spPr>
-        <p:txBody>
-          <a:bodyPr wrap="square">
-            <a:spAutoFit/>
-          </a:bodyPr>
-          <a:lstStyle/>
-          <a:p>
-            <a:r>
-              <a:rPr sz="1600" b="1">
-                <a:latin typeface="Segoe UI"/>
-                <a:hlinkClick r:id="rId4"/>
-              </a:rPr>
-              <a:t>▶  Evidence narrative (Q‑by‑Q mapping)</a:t>
-            </a:r>
-          </a:p>
-        </p:txBody>
-      </p:sp>
-      <p:sp>
-        <p:nvSpPr>
-          <p:cNvPr id="9" name="TextBox 8"/>
-          <p:cNvSpPr txBox="1"/>
-          <p:nvPr/>
-        </p:nvSpPr>
-        <p:spPr>
-          <a:xfrm>
-            <a:off x="6766560" y="5852160"/>
-            <a:ext cx="4754880" cy="365760"/>
-          </a:xfrm>
-          <a:prstGeom prst="rect">
-            <a:avLst/>
-          </a:prstGeom>
-          <a:noFill/>
-        </p:spPr>
-        <p:txBody>
-          <a:bodyPr wrap="square">
-            <a:spAutoFit/>
-          </a:bodyPr>
-          <a:lstStyle/>
-          <a:p>
-            <a:r>
-              <a:rPr sz="1600" b="1">
-                <a:latin typeface="Segoe UI"/>
-                <a:hlinkClick r:id="rId5"/>
-              </a:rPr>
-              <a:t>▶  Evidence KQL queries</a:t>
+              <a:t> It applies only if a genuine confidential middle tier is proven — which requires an exposed API scope and a credential.</a:t>
             </a:r>
           </a:p>
         </p:txBody>
@@ -5443,6 +5657,458 @@
 </file>
 
 <file path=ppt/slides/slide12.xml><?xml version="1.0" encoding="utf-8"?>
+<p:sld xmlns:a="http://schemas.openxmlformats.org/drawingml/2006/main" xmlns:p="http://schemas.openxmlformats.org/presentationml/2006/main" xmlns:r="http://schemas.openxmlformats.org/officeDocument/2006/relationships">
+  <p:cSld>
+    <p:bg>
+      <p:bgPr>
+        <a:solidFill>
+          <a:srgbClr val="FAFBFC"/>
+        </a:solidFill>
+        <a:effectLst/>
+      </p:bgPr>
+    </p:bg>
+    <p:spTree>
+      <p:nvGrpSpPr>
+        <p:cNvPr id="1" name=""/>
+        <p:cNvGrpSpPr/>
+        <p:nvPr/>
+      </p:nvGrpSpPr>
+      <p:grpSpPr/>
+      <p:sp>
+        <p:nvSpPr>
+          <p:cNvPr id="2" name="TextBox 1"/>
+          <p:cNvSpPr txBox="1"/>
+          <p:nvPr/>
+        </p:nvSpPr>
+        <p:spPr>
+          <a:xfrm>
+            <a:off x="640080" y="384048"/>
+            <a:ext cx="10881360" cy="320040"/>
+          </a:xfrm>
+          <a:prstGeom prst="rect">
+            <a:avLst/>
+          </a:prstGeom>
+          <a:noFill/>
+        </p:spPr>
+        <p:txBody>
+          <a:bodyPr wrap="square">
+            <a:spAutoFit/>
+          </a:bodyPr>
+          <a:lstStyle/>
+          <a:p>
+            <a:pPr algn="l"/>
+            <a:r>
+              <a:rPr sz="1200" b="1" i="0">
+                <a:solidFill>
+                  <a:srgbClr val="0067C0"/>
+                </a:solidFill>
+                <a:latin typeface="Segoe UI"/>
+              </a:rPr>
+              <a:t>REFERENCE IMPLEMENTATION</a:t>
+            </a:r>
+          </a:p>
+        </p:txBody>
+      </p:sp>
+      <p:sp>
+        <p:nvSpPr>
+          <p:cNvPr id="3" name="TextBox 2"/>
+          <p:cNvSpPr txBox="1"/>
+          <p:nvPr/>
+        </p:nvSpPr>
+        <p:spPr>
+          <a:xfrm>
+            <a:off x="640080" y="685800"/>
+            <a:ext cx="10881360" cy="777240"/>
+          </a:xfrm>
+          <a:prstGeom prst="rect">
+            <a:avLst/>
+          </a:prstGeom>
+          <a:noFill/>
+        </p:spPr>
+        <p:txBody>
+          <a:bodyPr wrap="square">
+            <a:spAutoFit/>
+          </a:bodyPr>
+          <a:lstStyle/>
+          <a:p>
+            <a:pPr algn="l"/>
+            <a:r>
+              <a:rPr sz="3200" b="1" i="0">
+                <a:solidFill>
+                  <a:srgbClr val="001B3D"/>
+                </a:solidFill>
+                <a:latin typeface="Segoe UI"/>
+              </a:rPr>
+              <a:t>The working demo</a:t>
+            </a:r>
+          </a:p>
+        </p:txBody>
+      </p:sp>
+      <p:sp>
+        <p:nvSpPr>
+          <p:cNvPr id="4" name="Rectangle 3"/>
+          <p:cNvSpPr/>
+          <p:nvPr/>
+        </p:nvSpPr>
+        <p:spPr>
+          <a:xfrm>
+            <a:off x="640080" y="1481328"/>
+            <a:ext cx="10881360" cy="31750"/>
+          </a:xfrm>
+          <a:prstGeom prst="rect">
+            <a:avLst/>
+          </a:prstGeom>
+          <a:solidFill>
+            <a:srgbClr val="0067C0"/>
+          </a:solidFill>
+          <a:ln>
+            <a:noFill/>
+          </a:ln>
+          <a:effectLst/>
+        </p:spPr>
+        <p:style>
+          <a:lnRef idx="1">
+            <a:schemeClr val="accent1"/>
+          </a:lnRef>
+          <a:fillRef idx="3">
+            <a:schemeClr val="accent1"/>
+          </a:fillRef>
+          <a:effectRef idx="2">
+            <a:schemeClr val="accent1"/>
+          </a:effectRef>
+          <a:fontRef idx="minor">
+            <a:schemeClr val="lt1"/>
+          </a:fontRef>
+        </p:style>
+        <p:txBody>
+          <a:bodyPr rtlCol="0" anchor="ctr"/>
+          <a:lstStyle/>
+          <a:p>
+            <a:pPr algn="ctr"/>
+          </a:p>
+        </p:txBody>
+      </p:sp>
+      <p:sp>
+        <p:nvSpPr>
+          <p:cNvPr id="5" name="TextBox 4"/>
+          <p:cNvSpPr txBox="1"/>
+          <p:nvPr/>
+        </p:nvSpPr>
+        <p:spPr>
+          <a:xfrm>
+            <a:off x="685800" y="1874519"/>
+            <a:ext cx="10789920" cy="4206240"/>
+          </a:xfrm>
+          <a:prstGeom prst="rect">
+            <a:avLst/>
+          </a:prstGeom>
+          <a:noFill/>
+        </p:spPr>
+        <p:txBody>
+          <a:bodyPr wrap="square">
+            <a:spAutoFit/>
+          </a:bodyPr>
+          <a:lstStyle/>
+          <a:p>
+            <a:pPr>
+              <a:spcAft>
+                <a:spcPts val="1200"/>
+              </a:spcAft>
+            </a:pPr>
+            <a:r>
+              <a:rPr sz="1600">
+                <a:solidFill>
+                  <a:srgbClr val="0067C0"/>
+                </a:solidFill>
+                <a:latin typeface="Segoe UI"/>
+              </a:rPr>
+              <a:t>▪  </a:t>
+            </a:r>
+            <a:r>
+              <a:rPr sz="1600" b="0">
+                <a:solidFill>
+                  <a:srgbClr val="1A1A1A"/>
+                </a:solidFill>
+                <a:latin typeface="Segoe UI"/>
+              </a:rPr>
+              <a:t>A live SPA + API in a Microsoft demo tenant that makes the flow shapes observable — nothing runs against Desjardins or Croesus tenants.</a:t>
+            </a:r>
+          </a:p>
+          <a:p>
+            <a:pPr>
+              <a:spcAft>
+                <a:spcPts val="1200"/>
+              </a:spcAft>
+            </a:pPr>
+            <a:r>
+              <a:rPr sz="1600">
+                <a:solidFill>
+                  <a:srgbClr val="0067C0"/>
+                </a:solidFill>
+                <a:latin typeface="Segoe UI"/>
+              </a:rPr>
+              <a:t>▪  </a:t>
+            </a:r>
+            <a:r>
+              <a:rPr sz="1600" b="1">
+                <a:solidFill>
+                  <a:srgbClr val="1A1A1A"/>
+                </a:solidFill>
+                <a:latin typeface="Segoe UI"/>
+              </a:rPr>
+              <a:t>Wrong vs right:</a:t>
+            </a:r>
+            <a:r>
+              <a:rPr sz="1600" b="0">
+                <a:solidFill>
+                  <a:srgbClr val="1A1A1A"/>
+                </a:solidFill>
+                <a:latin typeface="Segoe UI"/>
+              </a:rPr>
+              <a:t> a token replay to Microsoft Graph is rejected on audience, while a real On-Behalf-Of exchange issues a distinct, separately audienced token.</a:t>
+            </a:r>
+          </a:p>
+          <a:p>
+            <a:pPr>
+              <a:spcAft>
+                <a:spcPts val="1200"/>
+              </a:spcAft>
+            </a:pPr>
+            <a:r>
+              <a:rPr sz="1600">
+                <a:solidFill>
+                  <a:srgbClr val="0067C0"/>
+                </a:solidFill>
+                <a:latin typeface="Segoe UI"/>
+              </a:rPr>
+              <a:t>▪  </a:t>
+            </a:r>
+            <a:r>
+              <a:rPr sz="1600" b="1">
+                <a:solidFill>
+                  <a:srgbClr val="1A1A1A"/>
+                </a:solidFill>
+                <a:latin typeface="Segoe UI"/>
+              </a:rPr>
+              <a:t>The registration fork:</a:t>
+            </a:r>
+            <a:r>
+              <a:rPr sz="1600" b="0">
+                <a:solidFill>
+                  <a:srgbClr val="1A1A1A"/>
+                </a:solidFill>
+                <a:latin typeface="Segoe UI"/>
+              </a:rPr>
+              <a:t> a panel walks through spa vs web and the AADSTS9002327 behaviour, with direct links to Q7 and Q8.</a:t>
+            </a:r>
+          </a:p>
+          <a:p>
+            <a:pPr>
+              <a:spcAft>
+                <a:spcPts val="1200"/>
+              </a:spcAft>
+            </a:pPr>
+            <a:r>
+              <a:rPr sz="1600">
+                <a:solidFill>
+                  <a:srgbClr val="0067C0"/>
+                </a:solidFill>
+                <a:latin typeface="Segoe UI"/>
+              </a:rPr>
+              <a:t>▪  </a:t>
+            </a:r>
+            <a:r>
+              <a:rPr sz="1600" b="1">
+                <a:solidFill>
+                  <a:srgbClr val="1A1A1A"/>
+                </a:solidFill>
+                <a:latin typeface="Segoe UI"/>
+              </a:rPr>
+              <a:t>Token inspector and evidence panel:</a:t>
+            </a:r>
+            <a:r>
+              <a:rPr sz="1600" b="0">
+                <a:solidFill>
+                  <a:srgbClr val="1A1A1A"/>
+                </a:solidFill>
+                <a:latin typeface="Segoe UI"/>
+              </a:rPr>
+              <a:t> decoded claims show audience binding rather than a reused bearer. The raw-token inspector is gated off by default — we ask the vendor for hashes, so we do not demo copying live tokens.</a:t>
+            </a:r>
+          </a:p>
+          <a:p>
+            <a:pPr>
+              <a:spcAft>
+                <a:spcPts val="1200"/>
+              </a:spcAft>
+            </a:pPr>
+            <a:r>
+              <a:rPr sz="1600">
+                <a:solidFill>
+                  <a:srgbClr val="0067C0"/>
+                </a:solidFill>
+                <a:latin typeface="Segoe UI"/>
+              </a:rPr>
+              <a:t>▪  </a:t>
+            </a:r>
+            <a:r>
+              <a:rPr sz="1600" b="1">
+                <a:solidFill>
+                  <a:srgbClr val="1A1A1A"/>
+                </a:solidFill>
+                <a:latin typeface="Segoe UI"/>
+              </a:rPr>
+              <a:t>Tier 2 exhibits (gated):</a:t>
+            </a:r>
+            <a:r>
+              <a:rPr sz="1600" b="0">
+                <a:solidFill>
+                  <a:srgbClr val="1A1A1A"/>
+                </a:solidFill>
+                <a:latin typeface="Segoe UI"/>
+              </a:rPr>
+              <a:t> a server-side replay control, and a report-only Token Protection policy that reproduces the real 1008 signal on a supported resource.</a:t>
+            </a:r>
+          </a:p>
+        </p:txBody>
+      </p:sp>
+      <p:sp>
+        <p:nvSpPr>
+          <p:cNvPr id="6" name="TextBox 5"/>
+          <p:cNvSpPr txBox="1"/>
+          <p:nvPr/>
+        </p:nvSpPr>
+        <p:spPr>
+          <a:xfrm>
+            <a:off x="685800" y="5440680"/>
+            <a:ext cx="5943600" cy="365760"/>
+          </a:xfrm>
+          <a:prstGeom prst="rect">
+            <a:avLst/>
+          </a:prstGeom>
+          <a:noFill/>
+        </p:spPr>
+        <p:txBody>
+          <a:bodyPr wrap="square">
+            <a:spAutoFit/>
+          </a:bodyPr>
+          <a:lstStyle/>
+          <a:p>
+            <a:r>
+              <a:rPr sz="1600" b="1">
+                <a:latin typeface="Segoe UI"/>
+                <a:hlinkClick r:id="rId2"/>
+              </a:rPr>
+              <a:t>▶  Open the demo — croesus-spa.azurewebsites.net</a:t>
+            </a:r>
+          </a:p>
+        </p:txBody>
+      </p:sp>
+      <p:sp>
+        <p:nvSpPr>
+          <p:cNvPr id="7" name="TextBox 6"/>
+          <p:cNvSpPr txBox="1"/>
+          <p:nvPr/>
+        </p:nvSpPr>
+        <p:spPr>
+          <a:xfrm>
+            <a:off x="685800" y="5852160"/>
+            <a:ext cx="5943600" cy="365760"/>
+          </a:xfrm>
+          <a:prstGeom prst="rect">
+            <a:avLst/>
+          </a:prstGeom>
+          <a:noFill/>
+        </p:spPr>
+        <p:txBody>
+          <a:bodyPr wrap="square">
+            <a:spAutoFit/>
+          </a:bodyPr>
+          <a:lstStyle/>
+          <a:p>
+            <a:r>
+              <a:rPr sz="1600" b="1">
+                <a:latin typeface="Segoe UI"/>
+                <a:hlinkClick r:id="rId3"/>
+              </a:rPr>
+              <a:t>▶  Demo walkthrough guide</a:t>
+            </a:r>
+          </a:p>
+        </p:txBody>
+      </p:sp>
+      <p:sp>
+        <p:nvSpPr>
+          <p:cNvPr id="8" name="TextBox 7"/>
+          <p:cNvSpPr txBox="1"/>
+          <p:nvPr/>
+        </p:nvSpPr>
+        <p:spPr>
+          <a:xfrm>
+            <a:off x="6766560" y="5440680"/>
+            <a:ext cx="4754880" cy="365760"/>
+          </a:xfrm>
+          <a:prstGeom prst="rect">
+            <a:avLst/>
+          </a:prstGeom>
+          <a:noFill/>
+        </p:spPr>
+        <p:txBody>
+          <a:bodyPr wrap="square">
+            <a:spAutoFit/>
+          </a:bodyPr>
+          <a:lstStyle/>
+          <a:p>
+            <a:r>
+              <a:rPr sz="1600" b="1">
+                <a:latin typeface="Segoe UI"/>
+                <a:hlinkClick r:id="rId4"/>
+              </a:rPr>
+              <a:t>▶  Evidence narrative (Q‑by‑Q mapping)</a:t>
+            </a:r>
+          </a:p>
+        </p:txBody>
+      </p:sp>
+      <p:sp>
+        <p:nvSpPr>
+          <p:cNvPr id="9" name="TextBox 8"/>
+          <p:cNvSpPr txBox="1"/>
+          <p:nvPr/>
+        </p:nvSpPr>
+        <p:spPr>
+          <a:xfrm>
+            <a:off x="6766560" y="5852160"/>
+            <a:ext cx="4754880" cy="365760"/>
+          </a:xfrm>
+          <a:prstGeom prst="rect">
+            <a:avLst/>
+          </a:prstGeom>
+          <a:noFill/>
+        </p:spPr>
+        <p:txBody>
+          <a:bodyPr wrap="square">
+            <a:spAutoFit/>
+          </a:bodyPr>
+          <a:lstStyle/>
+          <a:p>
+            <a:r>
+              <a:rPr sz="1600" b="1">
+                <a:latin typeface="Segoe UI"/>
+                <a:hlinkClick r:id="rId5"/>
+              </a:rPr>
+              <a:t>▶  Evidence KQL queries</a:t>
+            </a:r>
+          </a:p>
+        </p:txBody>
+      </p:sp>
+    </p:spTree>
+  </p:cSld>
+  <p:clrMapOvr>
+    <a:masterClrMapping/>
+  </p:clrMapOvr>
+</p:sld>
+</file>
+
+<file path=ppt/slides/slide13.xml><?xml version="1.0" encoding="utf-8"?>
 <p:sld xmlns:a="http://schemas.openxmlformats.org/drawingml/2006/main" xmlns:p="http://schemas.openxmlformats.org/presentationml/2006/main" xmlns:r="http://schemas.openxmlformats.org/officeDocument/2006/relationships">
   <p:cSld>
     <p:bg>
@@ -6185,7 +6851,7 @@
 </p:sld>
 </file>
 
-<file path=ppt/slides/slide13.xml><?xml version="1.0" encoding="utf-8"?>
+<file path=ppt/slides/slide14.xml><?xml version="1.0" encoding="utf-8"?>
 <p:sld xmlns:a="http://schemas.openxmlformats.org/drawingml/2006/main" xmlns:p="http://schemas.openxmlformats.org/presentationml/2006/main" xmlns:r="http://schemas.openxmlformats.org/officeDocument/2006/relationships">
   <p:cSld>
     <p:bg>
@@ -9648,6 +10314,202 @@
     <p:bg>
       <p:bgPr>
         <a:solidFill>
+          <a:srgbClr val="FFFFFF"/>
+        </a:solidFill>
+        <a:effectLst/>
+      </p:bgPr>
+    </p:bg>
+    <p:spTree>
+      <p:nvGrpSpPr>
+        <p:cNvPr id="1" name=""/>
+        <p:cNvGrpSpPr/>
+        <p:nvPr/>
+      </p:nvGrpSpPr>
+      <p:grpSpPr/>
+      <p:sp>
+        <p:nvSpPr>
+          <p:cNvPr id="2" name="TextBox 1"/>
+          <p:cNvSpPr txBox="1"/>
+          <p:nvPr/>
+        </p:nvSpPr>
+        <p:spPr>
+          <a:xfrm>
+            <a:off x="640080" y="384048"/>
+            <a:ext cx="10881360" cy="320040"/>
+          </a:xfrm>
+          <a:prstGeom prst="rect">
+            <a:avLst/>
+          </a:prstGeom>
+          <a:noFill/>
+        </p:spPr>
+        <p:txBody>
+          <a:bodyPr wrap="square">
+            <a:spAutoFit/>
+          </a:bodyPr>
+          <a:lstStyle/>
+          <a:p>
+            <a:pPr algn="l"/>
+            <a:r>
+              <a:rPr sz="1200" b="1" i="0">
+                <a:solidFill>
+                  <a:srgbClr val="0067C0"/>
+                </a:solidFill>
+                <a:latin typeface="Segoe UI"/>
+              </a:rPr>
+              <a:t>SCREENSHOT</a:t>
+            </a:r>
+          </a:p>
+        </p:txBody>
+      </p:sp>
+      <p:sp>
+        <p:nvSpPr>
+          <p:cNvPr id="3" name="TextBox 2"/>
+          <p:cNvSpPr txBox="1"/>
+          <p:nvPr/>
+        </p:nvSpPr>
+        <p:spPr>
+          <a:xfrm>
+            <a:off x="640080" y="685800"/>
+            <a:ext cx="10881360" cy="777240"/>
+          </a:xfrm>
+          <a:prstGeom prst="rect">
+            <a:avLst/>
+          </a:prstGeom>
+          <a:noFill/>
+        </p:spPr>
+        <p:txBody>
+          <a:bodyPr wrap="square">
+            <a:spAutoFit/>
+          </a:bodyPr>
+          <a:lstStyle/>
+          <a:p>
+            <a:pPr algn="l"/>
+            <a:r>
+              <a:rPr sz="3200" b="1" i="0">
+                <a:solidFill>
+                  <a:srgbClr val="001B3D"/>
+                </a:solidFill>
+                <a:latin typeface="Segoe UI"/>
+              </a:rPr>
+              <a:t>The same fork, live in the demo</a:t>
+            </a:r>
+          </a:p>
+        </p:txBody>
+      </p:sp>
+      <p:sp>
+        <p:nvSpPr>
+          <p:cNvPr id="4" name="Rectangle 3"/>
+          <p:cNvSpPr/>
+          <p:nvPr/>
+        </p:nvSpPr>
+        <p:spPr>
+          <a:xfrm>
+            <a:off x="640080" y="1481328"/>
+            <a:ext cx="10881360" cy="31750"/>
+          </a:xfrm>
+          <a:prstGeom prst="rect">
+            <a:avLst/>
+          </a:prstGeom>
+          <a:solidFill>
+            <a:srgbClr val="0067C0"/>
+          </a:solidFill>
+          <a:ln>
+            <a:noFill/>
+          </a:ln>
+          <a:effectLst/>
+        </p:spPr>
+        <p:style>
+          <a:lnRef idx="1">
+            <a:schemeClr val="accent1"/>
+          </a:lnRef>
+          <a:fillRef idx="3">
+            <a:schemeClr val="accent1"/>
+          </a:fillRef>
+          <a:effectRef idx="2">
+            <a:schemeClr val="accent1"/>
+          </a:effectRef>
+          <a:fontRef idx="minor">
+            <a:schemeClr val="lt1"/>
+          </a:fontRef>
+        </p:style>
+        <p:txBody>
+          <a:bodyPr rtlCol="0" anchor="ctr"/>
+          <a:lstStyle/>
+          <a:p>
+            <a:pPr algn="ctr"/>
+          </a:p>
+        </p:txBody>
+      </p:sp>
+      <p:pic>
+        <p:nvPicPr>
+          <p:cNvPr id="5" name="Picture 4" descr="fork-panel.png"/>
+          <p:cNvPicPr>
+            <a:picLocks noChangeAspect="1"/>
+          </p:cNvPicPr>
+          <p:nvPr/>
+        </p:nvPicPr>
+        <p:blipFill>
+          <a:blip r:embed="rId2"/>
+          <a:stretch>
+            <a:fillRect/>
+          </a:stretch>
+        </p:blipFill>
+        <p:spPr>
+          <a:xfrm>
+            <a:off x="3920059" y="1783080"/>
+            <a:ext cx="4351577" cy="4663440"/>
+          </a:xfrm>
+          <a:prstGeom prst="rect">
+            <a:avLst/>
+          </a:prstGeom>
+        </p:spPr>
+      </p:pic>
+      <p:sp>
+        <p:nvSpPr>
+          <p:cNvPr id="6" name="TextBox 5"/>
+          <p:cNvSpPr txBox="1"/>
+          <p:nvPr/>
+        </p:nvSpPr>
+        <p:spPr>
+          <a:xfrm>
+            <a:off x="685800" y="6419088"/>
+            <a:ext cx="5943600" cy="320040"/>
+          </a:xfrm>
+          <a:prstGeom prst="rect">
+            <a:avLst/>
+          </a:prstGeom>
+          <a:noFill/>
+        </p:spPr>
+        <p:txBody>
+          <a:bodyPr wrap="square">
+            <a:spAutoFit/>
+          </a:bodyPr>
+          <a:lstStyle/>
+          <a:p>
+            <a:r>
+              <a:rPr sz="1300" b="1">
+                <a:latin typeface="Segoe UI"/>
+                <a:hlinkClick r:id="rId3"/>
+              </a:rPr>
+              <a:t>▶  Open it live — croesus-spa.azurewebsites.net</a:t>
+            </a:r>
+          </a:p>
+        </p:txBody>
+      </p:sp>
+    </p:spTree>
+  </p:cSld>
+  <p:clrMapOvr>
+    <a:masterClrMapping/>
+  </p:clrMapOvr>
+</p:sld>
+</file>
+
+<file path=ppt/slides/slide9.xml><?xml version="1.0" encoding="utf-8"?>
+<p:sld xmlns:a="http://schemas.openxmlformats.org/drawingml/2006/main" xmlns:p="http://schemas.openxmlformats.org/presentationml/2006/main" xmlns:r="http://schemas.openxmlformats.org/officeDocument/2006/relationships">
+  <p:cSld>
+    <p:bg>
+      <p:bgPr>
+        <a:solidFill>
           <a:srgbClr val="FAFBFC"/>
         </a:solidFill>
         <a:effectLst/>
@@ -10237,601 +11099,6 @@
                 <a:hlinkClick r:id="rId2"/>
               </a:rPr>
               <a:t>Details: README — Who can capture the /token Origin header →</a:t>
-            </a:r>
-          </a:p>
-        </p:txBody>
-      </p:sp>
-    </p:spTree>
-  </p:cSld>
-  <p:clrMapOvr>
-    <a:masterClrMapping/>
-  </p:clrMapOvr>
-</p:sld>
-</file>
-
-<file path=ppt/slides/slide9.xml><?xml version="1.0" encoding="utf-8"?>
-<p:sld xmlns:a="http://schemas.openxmlformats.org/drawingml/2006/main" xmlns:p="http://schemas.openxmlformats.org/presentationml/2006/main" xmlns:r="http://schemas.openxmlformats.org/officeDocument/2006/relationships">
-  <p:cSld>
-    <p:bg>
-      <p:bgPr>
-        <a:solidFill>
-          <a:srgbClr val="FAFBFC"/>
-        </a:solidFill>
-        <a:effectLst/>
-      </p:bgPr>
-    </p:bg>
-    <p:spTree>
-      <p:nvGrpSpPr>
-        <p:cNvPr id="1" name=""/>
-        <p:cNvGrpSpPr/>
-        <p:nvPr/>
-      </p:nvGrpSpPr>
-      <p:grpSpPr/>
-      <p:sp>
-        <p:nvSpPr>
-          <p:cNvPr id="2" name="TextBox 1"/>
-          <p:cNvSpPr txBox="1"/>
-          <p:nvPr/>
-        </p:nvSpPr>
-        <p:spPr>
-          <a:xfrm>
-            <a:off x="640080" y="384048"/>
-            <a:ext cx="10881360" cy="320040"/>
-          </a:xfrm>
-          <a:prstGeom prst="rect">
-            <a:avLst/>
-          </a:prstGeom>
-          <a:noFill/>
-        </p:spPr>
-        <p:txBody>
-          <a:bodyPr wrap="square">
-            <a:spAutoFit/>
-          </a:bodyPr>
-          <a:lstStyle/>
-          <a:p>
-            <a:pPr algn="l"/>
-            <a:r>
-              <a:rPr sz="1200" b="1" i="0">
-                <a:solidFill>
-                  <a:srgbClr val="0067C0"/>
-                </a:solidFill>
-                <a:latin typeface="Segoe UI"/>
-              </a:rPr>
-              <a:t>WHAT WE NEED FROM CROESUS</a:t>
-            </a:r>
-          </a:p>
-        </p:txBody>
-      </p:sp>
-      <p:sp>
-        <p:nvSpPr>
-          <p:cNvPr id="3" name="TextBox 2"/>
-          <p:cNvSpPr txBox="1"/>
-          <p:nvPr/>
-        </p:nvSpPr>
-        <p:spPr>
-          <a:xfrm>
-            <a:off x="640080" y="685800"/>
-            <a:ext cx="10881360" cy="777240"/>
-          </a:xfrm>
-          <a:prstGeom prst="rect">
-            <a:avLst/>
-          </a:prstGeom>
-          <a:noFill/>
-        </p:spPr>
-        <p:txBody>
-          <a:bodyPr wrap="square">
-            <a:spAutoFit/>
-          </a:bodyPr>
-          <a:lstStyle/>
-          <a:p>
-            <a:pPr algn="l"/>
-            <a:r>
-              <a:rPr sz="3200" b="1" i="0">
-                <a:solidFill>
-                  <a:srgbClr val="001B3D"/>
-                </a:solidFill>
-                <a:latin typeface="Segoe UI"/>
-              </a:rPr>
-              <a:t>The asks: Q7 and Q8</a:t>
-            </a:r>
-          </a:p>
-        </p:txBody>
-      </p:sp>
-      <p:sp>
-        <p:nvSpPr>
-          <p:cNvPr id="4" name="Rectangle 3"/>
-          <p:cNvSpPr/>
-          <p:nvPr/>
-        </p:nvSpPr>
-        <p:spPr>
-          <a:xfrm>
-            <a:off x="640080" y="1481328"/>
-            <a:ext cx="10881360" cy="31750"/>
-          </a:xfrm>
-          <a:prstGeom prst="rect">
-            <a:avLst/>
-          </a:prstGeom>
-          <a:solidFill>
-            <a:srgbClr val="0067C0"/>
-          </a:solidFill>
-          <a:ln>
-            <a:noFill/>
-          </a:ln>
-          <a:effectLst/>
-        </p:spPr>
-        <p:style>
-          <a:lnRef idx="1">
-            <a:schemeClr val="accent1"/>
-          </a:lnRef>
-          <a:fillRef idx="3">
-            <a:schemeClr val="accent1"/>
-          </a:fillRef>
-          <a:effectRef idx="2">
-            <a:schemeClr val="accent1"/>
-          </a:effectRef>
-          <a:fontRef idx="minor">
-            <a:schemeClr val="lt1"/>
-          </a:fontRef>
-        </p:style>
-        <p:txBody>
-          <a:bodyPr rtlCol="0" anchor="ctr"/>
-          <a:lstStyle/>
-          <a:p>
-            <a:pPr algn="ctr"/>
-          </a:p>
-        </p:txBody>
-      </p:sp>
-      <p:sp>
-        <p:nvSpPr>
-          <p:cNvPr id="5" name="Rounded Rectangle 4"/>
-          <p:cNvSpPr/>
-          <p:nvPr/>
-        </p:nvSpPr>
-        <p:spPr>
-          <a:xfrm>
-            <a:off x="685800" y="1874519"/>
-            <a:ext cx="5257800" cy="3108960"/>
-          </a:xfrm>
-          <a:prstGeom prst="roundRect">
-            <a:avLst/>
-          </a:prstGeom>
-          <a:solidFill>
-            <a:srgbClr val="FFFFFF"/>
-          </a:solidFill>
-          <a:ln>
-            <a:solidFill>
-              <a:srgbClr val="E1E5E8"/>
-            </a:solidFill>
-          </a:ln>
-          <a:effectLst/>
-        </p:spPr>
-        <p:style>
-          <a:lnRef idx="1">
-            <a:schemeClr val="accent1"/>
-          </a:lnRef>
-          <a:fillRef idx="3">
-            <a:schemeClr val="accent1"/>
-          </a:fillRef>
-          <a:effectRef idx="2">
-            <a:schemeClr val="accent1"/>
-          </a:effectRef>
-          <a:fontRef idx="minor">
-            <a:schemeClr val="lt1"/>
-          </a:fontRef>
-        </p:style>
-        <p:txBody>
-          <a:bodyPr rtlCol="0" anchor="ctr"/>
-          <a:lstStyle/>
-          <a:p/>
-        </p:txBody>
-      </p:sp>
-      <p:sp>
-        <p:nvSpPr>
-          <p:cNvPr id="6" name="Rectangle 5"/>
-          <p:cNvSpPr/>
-          <p:nvPr/>
-        </p:nvSpPr>
-        <p:spPr>
-          <a:xfrm>
-            <a:off x="685800" y="1874519"/>
-            <a:ext cx="5257800" cy="63500"/>
-          </a:xfrm>
-          <a:prstGeom prst="rect">
-            <a:avLst/>
-          </a:prstGeom>
-          <a:solidFill>
-            <a:srgbClr val="0067C0"/>
-          </a:solidFill>
-          <a:ln>
-            <a:noFill/>
-          </a:ln>
-          <a:effectLst/>
-        </p:spPr>
-        <p:style>
-          <a:lnRef idx="1">
-            <a:schemeClr val="accent1"/>
-          </a:lnRef>
-          <a:fillRef idx="3">
-            <a:schemeClr val="accent1"/>
-          </a:fillRef>
-          <a:effectRef idx="2">
-            <a:schemeClr val="accent1"/>
-          </a:effectRef>
-          <a:fontRef idx="minor">
-            <a:schemeClr val="lt1"/>
-          </a:fontRef>
-        </p:style>
-        <p:txBody>
-          <a:bodyPr rtlCol="0" anchor="ctr"/>
-          <a:lstStyle/>
-          <a:p>
-            <a:pPr algn="ctr"/>
-          </a:p>
-        </p:txBody>
-      </p:sp>
-      <p:sp>
-        <p:nvSpPr>
-          <p:cNvPr id="7" name="TextBox 6"/>
-          <p:cNvSpPr txBox="1"/>
-          <p:nvPr/>
-        </p:nvSpPr>
-        <p:spPr>
-          <a:xfrm>
-            <a:off x="914400" y="2075688"/>
-            <a:ext cx="4800600" cy="457200"/>
-          </a:xfrm>
-          <a:prstGeom prst="rect">
-            <a:avLst/>
-          </a:prstGeom>
-          <a:noFill/>
-        </p:spPr>
-        <p:txBody>
-          <a:bodyPr wrap="square">
-            <a:spAutoFit/>
-          </a:bodyPr>
-          <a:lstStyle/>
-          <a:p>
-            <a:pPr algn="l"/>
-            <a:r>
-              <a:rPr sz="1700" b="1" i="0">
-                <a:solidFill>
-                  <a:srgbClr val="0067C0"/>
-                </a:solidFill>
-                <a:latin typeface="Segoe UI"/>
-              </a:rPr>
-              <a:t>Q7 — one redacted /token capture</a:t>
-            </a:r>
-          </a:p>
-        </p:txBody>
-      </p:sp>
-      <p:sp>
-        <p:nvSpPr>
-          <p:cNvPr id="8" name="TextBox 7"/>
-          <p:cNvSpPr txBox="1"/>
-          <p:nvPr/>
-        </p:nvSpPr>
-        <p:spPr>
-          <a:xfrm>
-            <a:off x="914400" y="2651760"/>
-            <a:ext cx="4800600" cy="2148839"/>
-          </a:xfrm>
-          <a:prstGeom prst="rect">
-            <a:avLst/>
-          </a:prstGeom>
-          <a:noFill/>
-        </p:spPr>
-        <p:txBody>
-          <a:bodyPr wrap="square">
-            <a:spAutoFit/>
-          </a:bodyPr>
-          <a:lstStyle/>
-          <a:p>
-            <a:pPr>
-              <a:spcAft>
-                <a:spcPts val="800"/>
-              </a:spcAft>
-            </a:pPr>
-            <a:r>
-              <a:rPr sz="1400" b="1">
-                <a:solidFill>
-                  <a:srgbClr val="1A1A1A"/>
-                </a:solidFill>
-                <a:latin typeface="Segoe UI"/>
-              </a:rPr>
-              <a:t>For one successful and one failing transaction:</a:t>
-            </a:r>
-          </a:p>
-          <a:p>
-            <a:pPr>
-              <a:spcAft>
-                <a:spcPts val="800"/>
-              </a:spcAft>
-            </a:pPr>
-            <a:r>
-              <a:rPr sz="1400" b="0">
-                <a:solidFill>
-                  <a:srgbClr val="1A1A1A"/>
-                </a:solidFill>
-                <a:latin typeface="Segoe UI"/>
-              </a:rPr>
-              <a:t>Is an Origin header present?  •  grant_type  •  client_id  •  redirect URI  •  client-authentication method</a:t>
-            </a:r>
-          </a:p>
-          <a:p>
-            <a:pPr>
-              <a:spcAft>
-                <a:spcPts val="800"/>
-              </a:spcAft>
-            </a:pPr>
-            <a:r>
-              <a:rPr sz="1400" b="1">
-                <a:solidFill>
-                  <a:srgbClr val="1A1A1A"/>
-                </a:solidFill>
-                <a:latin typeface="Segoe UI"/>
-              </a:rPr>
-              <a:t>Presence indicators or SHA-256 hashes only. Never raw codes, tokens, secrets, or assertions.</a:t>
-            </a:r>
-          </a:p>
-        </p:txBody>
-      </p:sp>
-      <p:sp>
-        <p:nvSpPr>
-          <p:cNvPr id="9" name="Rounded Rectangle 8"/>
-          <p:cNvSpPr/>
-          <p:nvPr/>
-        </p:nvSpPr>
-        <p:spPr>
-          <a:xfrm>
-            <a:off x="6263640" y="1874519"/>
-            <a:ext cx="5257800" cy="3108960"/>
-          </a:xfrm>
-          <a:prstGeom prst="roundRect">
-            <a:avLst/>
-          </a:prstGeom>
-          <a:solidFill>
-            <a:srgbClr val="FFFFFF"/>
-          </a:solidFill>
-          <a:ln>
-            <a:solidFill>
-              <a:srgbClr val="E1E5E8"/>
-            </a:solidFill>
-          </a:ln>
-          <a:effectLst/>
-        </p:spPr>
-        <p:style>
-          <a:lnRef idx="1">
-            <a:schemeClr val="accent1"/>
-          </a:lnRef>
-          <a:fillRef idx="3">
-            <a:schemeClr val="accent1"/>
-          </a:fillRef>
-          <a:effectRef idx="2">
-            <a:schemeClr val="accent1"/>
-          </a:effectRef>
-          <a:fontRef idx="minor">
-            <a:schemeClr val="lt1"/>
-          </a:fontRef>
-        </p:style>
-        <p:txBody>
-          <a:bodyPr rtlCol="0" anchor="ctr"/>
-          <a:lstStyle/>
-          <a:p/>
-        </p:txBody>
-      </p:sp>
-      <p:sp>
-        <p:nvSpPr>
-          <p:cNvPr id="10" name="Rectangle 9"/>
-          <p:cNvSpPr/>
-          <p:nvPr/>
-        </p:nvSpPr>
-        <p:spPr>
-          <a:xfrm>
-            <a:off x="6263640" y="1874519"/>
-            <a:ext cx="5257800" cy="63500"/>
-          </a:xfrm>
-          <a:prstGeom prst="rect">
-            <a:avLst/>
-          </a:prstGeom>
-          <a:solidFill>
-            <a:srgbClr val="0067C0"/>
-          </a:solidFill>
-          <a:ln>
-            <a:noFill/>
-          </a:ln>
-          <a:effectLst/>
-        </p:spPr>
-        <p:style>
-          <a:lnRef idx="1">
-            <a:schemeClr val="accent1"/>
-          </a:lnRef>
-          <a:fillRef idx="3">
-            <a:schemeClr val="accent1"/>
-          </a:fillRef>
-          <a:effectRef idx="2">
-            <a:schemeClr val="accent1"/>
-          </a:effectRef>
-          <a:fontRef idx="minor">
-            <a:schemeClr val="lt1"/>
-          </a:fontRef>
-        </p:style>
-        <p:txBody>
-          <a:bodyPr rtlCol="0" anchor="ctr"/>
-          <a:lstStyle/>
-          <a:p>
-            <a:pPr algn="ctr"/>
-          </a:p>
-        </p:txBody>
-      </p:sp>
-      <p:sp>
-        <p:nvSpPr>
-          <p:cNvPr id="11" name="TextBox 10"/>
-          <p:cNvSpPr txBox="1"/>
-          <p:nvPr/>
-        </p:nvSpPr>
-        <p:spPr>
-          <a:xfrm>
-            <a:off x="6492240" y="2075688"/>
-            <a:ext cx="4800600" cy="457200"/>
-          </a:xfrm>
-          <a:prstGeom prst="rect">
-            <a:avLst/>
-          </a:prstGeom>
-          <a:noFill/>
-        </p:spPr>
-        <p:txBody>
-          <a:bodyPr wrap="square">
-            <a:spAutoFit/>
-          </a:bodyPr>
-          <a:lstStyle/>
-          <a:p>
-            <a:pPr algn="l"/>
-            <a:r>
-              <a:rPr sz="1700" b="1" i="0">
-                <a:solidFill>
-                  <a:srgbClr val="0067C0"/>
-                </a:solidFill>
-                <a:latin typeface="Segoe UI"/>
-              </a:rPr>
-              <a:t>Q8 — complete registration inventory</a:t>
-            </a:r>
-          </a:p>
-        </p:txBody>
-      </p:sp>
-      <p:sp>
-        <p:nvSpPr>
-          <p:cNvPr id="12" name="TextBox 11"/>
-          <p:cNvSpPr txBox="1"/>
-          <p:nvPr/>
-        </p:nvSpPr>
-        <p:spPr>
-          <a:xfrm>
-            <a:off x="6492240" y="2651760"/>
-            <a:ext cx="4800600" cy="2148839"/>
-          </a:xfrm>
-          <a:prstGeom prst="rect">
-            <a:avLst/>
-          </a:prstGeom>
-          <a:noFill/>
-        </p:spPr>
-        <p:txBody>
-          <a:bodyPr wrap="square">
-            <a:spAutoFit/>
-          </a:bodyPr>
-          <a:lstStyle/>
-          <a:p>
-            <a:pPr>
-              <a:spcAft>
-                <a:spcPts val="800"/>
-              </a:spcAft>
-            </a:pPr>
-            <a:r>
-              <a:rPr sz="1400" b="1">
-                <a:solidFill>
-                  <a:srgbClr val="1A1A1A"/>
-                </a:solidFill>
-                <a:latin typeface="Segoe UI"/>
-              </a:rPr>
-              <a:t>Every app registration and service principal GPD Central uses, across environments.</a:t>
-            </a:r>
-          </a:p>
-          <a:p>
-            <a:pPr>
-              <a:spcAft>
-                <a:spcPts val="800"/>
-              </a:spcAft>
-            </a:pPr>
-            <a:r>
-              <a:rPr sz="1400" b="0">
-                <a:solidFill>
-                  <a:srgbClr val="1A1A1A"/>
-                </a:solidFill>
-                <a:latin typeface="Segoe UI"/>
-              </a:rPr>
-              <a:t>Including any confidential web/API registration that is not among the three spa exports we hold.</a:t>
-            </a:r>
-          </a:p>
-          <a:p>
-            <a:pPr>
-              <a:spcAft>
-                <a:spcPts val="800"/>
-              </a:spcAft>
-            </a:pPr>
-            <a:r>
-              <a:rPr sz="1400" b="1">
-                <a:solidFill>
-                  <a:srgbClr val="1A1A1A"/>
-                </a:solidFill>
-                <a:latin typeface="Segoe UI"/>
-              </a:rPr>
-              <a:t>Promoted to equal priority by the server-side finding.</a:t>
-            </a:r>
-          </a:p>
-        </p:txBody>
-      </p:sp>
-      <p:sp>
-        <p:nvSpPr>
-          <p:cNvPr id="13" name="TextBox 12"/>
-          <p:cNvSpPr txBox="1"/>
-          <p:nvPr/>
-        </p:nvSpPr>
-        <p:spPr>
-          <a:xfrm>
-            <a:off x="685800" y="5166360"/>
-            <a:ext cx="10789920" cy="457200"/>
-          </a:xfrm>
-          <a:prstGeom prst="rect">
-            <a:avLst/>
-          </a:prstGeom>
-          <a:noFill/>
-        </p:spPr>
-        <p:txBody>
-          <a:bodyPr wrap="square">
-            <a:spAutoFit/>
-          </a:bodyPr>
-          <a:lstStyle/>
-          <a:p>
-            <a:pPr algn="l"/>
-            <a:r>
-              <a:rPr sz="1500" b="0" i="0">
-                <a:solidFill>
-                  <a:srgbClr val="565656"/>
-                </a:solidFill>
-                <a:latin typeface="Segoe UI"/>
-              </a:rPr>
-              <a:t>Also open: Q1 intended flow  •  Q4 AWS egress ranges  •  Q5 cross-tenant device compliance  •  Q6 token-binding compatibility  •  Q9 Central vs Conseiller parity</a:t>
-            </a:r>
-          </a:p>
-        </p:txBody>
-      </p:sp>
-      <p:sp>
-        <p:nvSpPr>
-          <p:cNvPr id="14" name="TextBox 13"/>
-          <p:cNvSpPr txBox="1"/>
-          <p:nvPr/>
-        </p:nvSpPr>
-        <p:spPr>
-          <a:xfrm>
-            <a:off x="685800" y="5715000"/>
-            <a:ext cx="7315200" cy="411480"/>
-          </a:xfrm>
-          <a:prstGeom prst="rect">
-            <a:avLst/>
-          </a:prstGeom>
-          <a:noFill/>
-        </p:spPr>
-        <p:txBody>
-          <a:bodyPr wrap="square">
-            <a:spAutoFit/>
-          </a:bodyPr>
-          <a:lstStyle/>
-          <a:p>
-            <a:r>
-              <a:rPr sz="1700" b="1">
-                <a:latin typeface="Segoe UI"/>
-                <a:hlinkClick r:id="rId2"/>
-              </a:rPr>
-              <a:t>▶  Full question list Q1–Q9 on GitHub →</a:t>
             </a:r>
           </a:p>
         </p:txBody>

--- a/docs/deck/croesus-session-deck.pptx
+++ b/docs/deck/croesus-session-deck.pptx
@@ -655,7 +655,7 @@
           <a:lstStyle/>
           <a:p>
             <a:r>
-              <a:t>The point: every branch has a small, reversible fix. Nobody needs a re-architecture, and Desjardins does not need to weaken CA.</a:t>
+              <a:t>The point: every branch has a small, reversible fix. Nobody needs a re-architecture, and Desjardins does not need to weaken CA. On device trust — credit Mathieu Santerre for the correction: the inbound trust settings honour a device claim carried in a guest's token from their home tenant, so they cannot bridge Prod device state into a native non-prod sign-in.</a:t>
             </a:r>
           </a:p>
         </p:txBody>
@@ -5600,7 +5600,7 @@
                 </a:solidFill>
                 <a:latin typeface="Segoe UI"/>
               </a:rPr>
-              <a:t>Prefer B2B ‘Trust compliant devices’ over a broad CA exception.</a:t>
+              <a:t>Rule out device trust as the lever.</a:t>
             </a:r>
             <a:r>
               <a:rPr sz="1700" b="0">
@@ -5609,7 +5609,7 @@
                 </a:solidFill>
                 <a:latin typeface="Segoe UI"/>
               </a:rPr>
-              <a:t> It preserves the device-compliance signal instead of discarding it.</a:t>
+              <a:t> Cross-tenant ‘Trust compliant devices’ only fires on a B2B guest sign-in, and the blocked leg is a server-side call with no device context at all.</a:t>
             </a:r>
           </a:p>
           <a:p>

--- a/docs/deck/croesus-session-deck.pptx
+++ b/docs/deck/croesus-session-deck.pptx
@@ -4633,7 +4633,7 @@
         <p:spPr>
           <a:xfrm>
             <a:off x="731520" y="4206240"/>
-            <a:ext cx="5486400" cy="365760"/>
+            <a:ext cx="5943600" cy="365760"/>
           </a:xfrm>
           <a:prstGeom prst="rect">
             <a:avLst/>
@@ -4665,7 +4665,7 @@
         <p:spPr>
           <a:xfrm>
             <a:off x="731520" y="4663440"/>
-            <a:ext cx="5486400" cy="365760"/>
+            <a:ext cx="5943600" cy="365760"/>
           </a:xfrm>
           <a:prstGeom prst="rect">
             <a:avLst/>
@@ -4697,7 +4697,7 @@
         <p:spPr>
           <a:xfrm>
             <a:off x="731520" y="5120640"/>
-            <a:ext cx="5486400" cy="365760"/>
+            <a:ext cx="5943600" cy="365760"/>
           </a:xfrm>
           <a:prstGeom prst="rect">
             <a:avLst/>
@@ -5292,7 +5292,7 @@
         <p:spPr>
           <a:xfrm>
             <a:off x="685800" y="5715000"/>
-            <a:ext cx="7315200" cy="411480"/>
+            <a:ext cx="8229600" cy="411480"/>
           </a:xfrm>
           <a:prstGeom prst="rect">
             <a:avLst/>
@@ -10473,7 +10473,7 @@
         <p:spPr>
           <a:xfrm>
             <a:off x="685800" y="6419088"/>
-            <a:ext cx="5943600" cy="320040"/>
+            <a:ext cx="6400800" cy="320040"/>
           </a:xfrm>
           <a:prstGeom prst="rect">
             <a:avLst/>
@@ -11080,7 +11080,7 @@
         <p:spPr>
           <a:xfrm>
             <a:off x="685800" y="5715000"/>
-            <a:ext cx="7315200" cy="365760"/>
+            <a:ext cx="8229600" cy="365760"/>
           </a:xfrm>
           <a:prstGeom prst="rect">
             <a:avLst/>

--- a/docs/deck/croesus-session-deck.pptx
+++ b/docs/deck/croesus-session-deck.pptx
@@ -515,7 +515,7 @@
           <a:lstStyle/>
           <a:p>
             <a:r>
-              <a:t>Framing: this is a joint fact-finding session, not a defect report. The Conditional Access block is correct-by-design. We have one open question and two asks that close it.</a:t>
+              <a:t>Framing: this is a joint fact-finding session, not a defect report. The Conditional Access block is correct-by-design. Scope is GPD Central only — Conseiller is a separate product and a separate assessment. Say that out loud early.</a:t>
             </a:r>
           </a:p>
         </p:txBody>
@@ -585,7 +585,7 @@
           <a:lstStyle/>
           <a:p>
             <a:r>
-              <a:t>Stress the redaction rule up front. It is what makes Q7 answerable by a security-conscious vendor.</a:t>
+              <a:t>Stress the redaction rule up front — it is what makes Q7 answerable by a security-conscious vendor. Q8 leads because it can end the ambiguity in a single reply.</a:t>
             </a:r>
           </a:p>
         </p:txBody>
@@ -655,7 +655,7 @@
           <a:lstStyle/>
           <a:p>
             <a:r>
-              <a:t>The point: every branch has a small, reversible fix. Nobody needs a re-architecture, and Desjardins does not need to weaken CA. On device trust — credit Mathieu Santerre for the correction: the inbound trust settings honour a device claim carried in a guest's token from their home tenant, so they cannot bridge Prod device state into a native non-prod sign-in.</a:t>
+              <a:t>The point: every route is small and reversible. Nobody needs a re-architecture and Desjardins does not need to weaken CA. On device trust — credit Mathieu Santerre for the correction: the inbound trust settings honour a device claim carried in a guest's token from their home tenant, so they cannot bridge Prod device state into a native non-prod sign-in. Do not use the .NET 4.5.2 support status as leverage — raise it separately through vendor risk review.</a:t>
             </a:r>
           </a:p>
         </p:txBody>
@@ -795,7 +795,7 @@
           <a:lstStyle/>
           <a:p>
             <a:r>
-              <a:t>Close by restating the guardrail. It protects both parties: no premature policy loosening, no premature vendor re-architecture.</a:t>
+              <a:t>Close by restating the guardrail. It protects both parties: no premature policy loosening, no premature vendor re-architecture. Item 1 is ours and needs nobody's permission.</a:t>
             </a:r>
           </a:p>
         </p:txBody>
@@ -1005,7 +1005,7 @@
           <a:lstStyle/>
           <a:p>
             <a:r>
-              <a:t>This slide is the executive summary. If the session ends after five minutes, these five lines are what must land.</a:t>
+              <a:t>This slide is the executive summary. If the session ends after five minutes, these five lines are what must land. Scope: Central only.</a:t>
             </a:r>
           </a:p>
         </p:txBody>
@@ -1215,7 +1215,7 @@
           <a:lstStyle/>
           <a:p>
             <a:r>
-              <a:t>This is the core hypothesis slide. Exactly one branch is true and each has a different, small remediation. Neither is a crisis.</a:t>
+              <a:t>This is the core slide. Neither explanation is a crisis and both have small remediations. Q8 separates them in one answer.</a:t>
             </a:r>
           </a:p>
         </p:txBody>
@@ -4549,7 +4549,7 @@
                 <a:latin typeface="Segoe UI"/>
               </a:rPr>
               <a:t>GPD Central SSO: what the evidence proves,
-and the two questions that close it</a:t>
+and the routes that close it</a:t>
             </a:r>
           </a:p>
         </p:txBody>
@@ -4584,7 +4584,7 @@
                 </a:solidFill>
                 <a:latin typeface="Segoe UI"/>
               </a:rPr>
-              <a:t>Entra ID app registrations, Conditional Access, and the server-side /token redemption</a:t>
+              <a:t>Entra ID app registrations, Conditional Access, and the server-side /token redemption  |  Central only — not Conseiller</a:t>
             </a:r>
           </a:p>
         </p:txBody>
@@ -4619,7 +4619,7 @@
                 </a:solidFill>
                 <a:latin typeface="Segoe UI"/>
               </a:rPr>
-              <a:t>3 August 2026</a:t>
+              <a:t>5 August 2026  —  updated after the three-way session</a:t>
             </a:r>
           </a:p>
         </p:txBody>
@@ -4651,7 +4651,7 @@
                 <a:latin typeface="Segoe UI"/>
                 <a:hlinkClick r:id="rId2"/>
               </a:rPr>
-              <a:t>▶  Live demo — croesus-spa.azurewebsites.net</a:t>
+              <a:t>▶  Session findings and all eight routes</a:t>
             </a:r>
           </a:p>
         </p:txBody>
@@ -4683,7 +4683,7 @@
                 <a:latin typeface="Segoe UI"/>
                 <a:hlinkClick r:id="rId3"/>
               </a:rPr>
-              <a:t>▶  Question list (Q1–Q9) on GitHub</a:t>
+              <a:t>▶  Question list (Q1–Q14) on GitHub</a:t>
             </a:r>
           </a:p>
         </p:txBody>
@@ -4715,7 +4715,7 @@
                 <a:latin typeface="Segoe UI"/>
                 <a:hlinkClick r:id="rId4"/>
               </a:rPr>
-              <a:t>▶  Full analysis — README</a:t>
+              <a:t>▶  Live demo — croesus-spa.azurewebsites.net</a:t>
             </a:r>
           </a:p>
         </p:txBody>
@@ -4811,7 +4811,7 @@
                 </a:solidFill>
                 <a:latin typeface="Segoe UI"/>
               </a:rPr>
-              <a:t>The asks: Q7 and Q8</a:t>
+              <a:t>The asks: Q8 first, then Q7</a:t>
             </a:r>
           </a:p>
         </p:txBody>
@@ -4978,7 +4978,7 @@
                 </a:solidFill>
                 <a:latin typeface="Segoe UI"/>
               </a:rPr>
-              <a:t>Q7 — one redacted /token capture</a:t>
+              <a:t>Q8 — complete registration inventory</a:t>
             </a:r>
           </a:p>
         </p:txBody>
@@ -5017,7 +5017,7 @@
                 </a:solidFill>
                 <a:latin typeface="Segoe UI"/>
               </a:rPr>
-              <a:t>For one successful and one failing transaction:</a:t>
+              <a:t>Every app registration and service principal GPD Central uses, across environments.</a:t>
             </a:r>
           </a:p>
           <a:p>
@@ -5033,7 +5033,7 @@
                 </a:solidFill>
                 <a:latin typeface="Segoe UI"/>
               </a:rPr>
-              <a:t>Is an Origin header present?  •  grant_type  •  client_id  •  redirect URI  •  client-authentication method</a:t>
+              <a:t>Including any confidential web/API registration that is not among the three spa exports we hold.</a:t>
             </a:r>
           </a:p>
           <a:p>
@@ -5049,7 +5049,7 @@
                 </a:solidFill>
                 <a:latin typeface="Segoe UI"/>
               </a:rPr>
-              <a:t>Presence indicators or SHA-256 hashes only. Never raw codes, tokens, secrets, or assertions.</a:t>
+              <a:t>One answer separates the two surviving explanations. This is the fastest route to a supported configuration.</a:t>
             </a:r>
           </a:p>
         </p:txBody>
@@ -5172,7 +5172,7 @@
                 </a:solidFill>
                 <a:latin typeface="Segoe UI"/>
               </a:rPr>
-              <a:t>Q8 — complete registration inventory</a:t>
+              <a:t>Q7 — one redacted /token capture</a:t>
             </a:r>
           </a:p>
         </p:txBody>
@@ -5211,7 +5211,7 @@
                 </a:solidFill>
                 <a:latin typeface="Segoe UI"/>
               </a:rPr>
-              <a:t>Every app registration and service principal GPD Central uses, across environments.</a:t>
+              <a:t>For one successful and one failing transaction:</a:t>
             </a:r>
           </a:p>
           <a:p>
@@ -5227,7 +5227,7 @@
                 </a:solidFill>
                 <a:latin typeface="Segoe UI"/>
               </a:rPr>
-              <a:t>Including any confidential web/API registration that is not among the three spa exports we hold.</a:t>
+              <a:t>Is an Origin header present?  •  grant_type  •  client_id  •  redirect URI  •  client-authentication method</a:t>
             </a:r>
           </a:p>
           <a:p>
@@ -5243,7 +5243,7 @@
                 </a:solidFill>
                 <a:latin typeface="Segoe UI"/>
               </a:rPr>
-              <a:t>Promoted to equal priority by the server-side finding.</a:t>
+              <a:t>Presence indicators or SHA-256 hashes only. Never raw codes, tokens, secrets, or assertions.</a:t>
             </a:r>
           </a:p>
         </p:txBody>
@@ -5278,7 +5278,7 @@
                 </a:solidFill>
                 <a:latin typeface="Segoe UI"/>
               </a:rPr>
-              <a:t>Also open: Q1 intended flow  •  Q4 AWS egress ranges  •  Q5 cross-tenant device compliance  •  Q6 token-binding compatibility  •  Q9 Central vs Conseiller parity</a:t>
+              <a:t>Also open: Q13 auth library and .NET roadmap  •  Q10 sizing of the change  •  Q12 route Entra calls over the existing site-to-site VPN  •  Q4 AWS egress ranges  •  Q9 does Conseiller share anything with Central?</a:t>
             </a:r>
           </a:p>
         </p:txBody>
@@ -5310,7 +5310,7 @@
                 <a:latin typeface="Segoe UI"/>
                 <a:hlinkClick r:id="rId2"/>
               </a:rPr>
-              <a:t>▶  Full question list Q1–Q9 on GitHub →</a:t>
+              <a:t>▶  Full question list Q1–Q14 on GitHub →</a:t>
             </a:r>
           </a:p>
         </p:txBody>
@@ -5371,7 +5371,7 @@
                 </a:solidFill>
                 <a:latin typeface="Segoe UI"/>
               </a:rPr>
-              <a:t>ONCE THE FORK IS RESOLVED</a:t>
+              <a:t>EIGHT ROUTES, RANKED</a:t>
             </a:r>
           </a:p>
         </p:txBody>
@@ -5498,7 +5498,7 @@
                 </a:solidFill>
                 <a:latin typeface="Segoe UI"/>
               </a:rPr>
-              <a:t>Classify first.</a:t>
+              <a:t>Check tenant parity first — Desjardins alone.</a:t>
             </a:r>
             <a:r>
               <a:rPr sz="1700" b="0">
@@ -5507,7 +5507,7 @@
                 </a:solidFill>
                 <a:latin typeface="Segoe UI"/>
               </a:rPr>
-              <a:t> No Conditional Access change, no AWS IP allowlist, and no OBO mandate until the grant is known.</a:t>
+              <a:t> Compare how Prod and non-prod scope Conditional Access for Central. No vendor dependency, and it may be the whole fix.</a:t>
             </a:r>
           </a:p>
           <a:p>
@@ -5532,7 +5532,7 @@
                 </a:solidFill>
                 <a:latin typeface="Segoe UI"/>
               </a:rPr>
-              <a:t>Branch A → register a web confidential client.</a:t>
+              <a:t>Route Entra calls over the existing site-to-site VPN (Q12).</a:t>
             </a:r>
             <a:r>
               <a:rPr sz="1700" b="0">
@@ -5541,7 +5541,7 @@
                 </a:solidFill>
                 <a:latin typeface="Segoe UI"/>
               </a:rPr>
-              <a:t> A certificate credential on the Croesus side. Smallest possible change; no Desjardins policy change needed.</a:t>
+              <a:t> The /token request then egresses from a Desjardins-owned address. No Croesus code change at all — the strongest short-term lever.</a:t>
             </a:r>
           </a:p>
           <a:p>
@@ -5566,7 +5566,7 @@
                 </a:solidFill>
                 <a:latin typeface="Segoe UI"/>
               </a:rPr>
-              <a:t>Branch B → scope to the disclosed registration.</a:t>
+              <a:t>Correct the registration shape — spa → web.</a:t>
             </a:r>
             <a:r>
               <a:rPr sz="1700" b="0">
@@ -5575,7 +5575,7 @@
                 </a:solidFill>
                 <a:latin typeface="Segoe UI"/>
               </a:rPr>
-              <a:t> Apply any accommodation to that specific service principal rather than to a broad IP range.</a:t>
+              <a:t> Staged: a client secret proves it with no library and no framework uplift; a certificate hardens it later. Per-tenant, so Desjardins can move first.</a:t>
             </a:r>
           </a:p>
           <a:p>
@@ -5609,7 +5609,7 @@
                 </a:solidFill>
                 <a:latin typeface="Segoe UI"/>
               </a:rPr>
-              <a:t> Cross-tenant ‘Trust compliant devices’ only fires on a B2B guest sign-in, and the blocked leg is a server-side call with no device context at all.</a:t>
+              <a:t> Cross-tenant ‘Trust compliant devices’ only fires on a B2B guest sign-in. Workstations join one tenant — Prod — so in non-prod ‘require compliant device’ is unsatisfiable, not merely strict.</a:t>
             </a:r>
           </a:p>
           <a:p>
@@ -5634,7 +5634,7 @@
                 </a:solidFill>
                 <a:latin typeface="Segoe UI"/>
               </a:rPr>
-              <a:t>On-Behalf-Of is an option, not a requirement.</a:t>
+              <a:t>A named location is a condition, not a grant.</a:t>
             </a:r>
             <a:r>
               <a:rPr sz="1700" b="0">
@@ -5643,7 +5643,7 @@
                 </a:solidFill>
                 <a:latin typeface="Segoe UI"/>
               </a:rPr>
-              <a:t> It applies only if a genuine confidential middle tier is proven — which requires an exposed API scope and a credential.</a:t>
+              <a:t> Grant controls combine with AND, so a trusted location does not satisfy a compliant-device requirement. On-Behalf-Of remains an option, not a requirement.</a:t>
             </a:r>
           </a:p>
         </p:txBody>
@@ -5890,7 +5890,7 @@
                 </a:solidFill>
                 <a:latin typeface="Segoe UI"/>
               </a:rPr>
-              <a:t>The registration fork:</a:t>
+              <a:t>The registration mismatch:</a:t>
             </a:r>
             <a:r>
               <a:rPr sz="1600" b="0">
@@ -5899,7 +5899,7 @@
                 </a:solidFill>
                 <a:latin typeface="Segoe UI"/>
               </a:rPr>
-              <a:t> a panel walks through spa vs web and the AADSTS9002327 behaviour, with direct links to Q7 and Q8.</a:t>
+              <a:t> a panel walks through spa vs web and the AADSTS9002327 behaviour, with direct links to Q8 and Q7.</a:t>
             </a:r>
           </a:p>
           <a:p>
@@ -6389,7 +6389,7 @@
                           </a:solidFill>
                           <a:latin typeface="Segoe UI"/>
                         </a:rPr>
-                        <a:t>Query Entra sign-in logs for the server-side leg: success vs AADSTS9002327</a:t>
+                        <a:t>Compare Conditional Access scoping for Central across Prod and non-prod</a:t>
                       </a:r>
                     </a:p>
                   </a:txBody>
@@ -6433,7 +6433,7 @@
                           </a:solidFill>
                           <a:latin typeface="Segoe UI"/>
                         </a:rPr>
-                        <a:t>Narrows the fork without the vendor</a:t>
+                        <a:t>May be the whole fix — no vendor wait</a:t>
                       </a:r>
                     </a:p>
                   </a:txBody>
@@ -6479,7 +6479,7 @@
                           </a:solidFill>
                           <a:latin typeface="Segoe UI"/>
                         </a:rPr>
-                        <a:t>Provide one redacted /token capture (hashes / presence only)</a:t>
+                        <a:t>Provide the complete registration and service-principal inventory</a:t>
                       </a:r>
                     </a:p>
                   </a:txBody>
@@ -6523,7 +6523,7 @@
                           </a:solidFill>
                           <a:latin typeface="Segoe UI"/>
                         </a:rPr>
-                        <a:t>Q7</a:t>
+                        <a:t>Q8 — primary</a:t>
                       </a:r>
                     </a:p>
                   </a:txBody>
@@ -6569,7 +6569,7 @@
                           </a:solidFill>
                           <a:latin typeface="Segoe UI"/>
                         </a:rPr>
-                        <a:t>Provide the complete registration and service-principal inventory</a:t>
+                        <a:t>Provide one redacted /token capture (hashes / presence only)</a:t>
                       </a:r>
                     </a:p>
                   </a:txBody>
@@ -6613,7 +6613,7 @@
                           </a:solidFill>
                           <a:latin typeface="Segoe UI"/>
                         </a:rPr>
-                        <a:t>Q8</a:t>
+                        <a:t>Q7</a:t>
                       </a:r>
                     </a:p>
                   </a:txBody>
@@ -6659,7 +6659,7 @@
                           </a:solidFill>
                           <a:latin typeface="Segoe UI"/>
                         </a:rPr>
-                        <a:t>Provide AWS egress IP ranges and the intended flow definition</a:t>
+                        <a:t>Confirm the auth library and any .NET Framework uplift plan</a:t>
                       </a:r>
                     </a:p>
                   </a:txBody>
@@ -6703,7 +6703,7 @@
                           </a:solidFill>
                           <a:latin typeface="Segoe UI"/>
                         </a:rPr>
-                        <a:t>Q4, Q1</a:t>
+                        <a:t>Q13</a:t>
                       </a:r>
                     </a:p>
                   </a:txBody>
@@ -6749,7 +6749,7 @@
                           </a:solidFill>
                           <a:latin typeface="Segoe UI"/>
                         </a:rPr>
-                        <a:t>Choose the minimum remediation once the branch is known</a:t>
+                        <a:t>Assess routing Entra calls over the existing site-to-site VPN</a:t>
                       </a:r>
                     </a:p>
                   </a:txBody>
@@ -6793,7 +6793,7 @@
                           </a:solidFill>
                           <a:latin typeface="Segoe UI"/>
                         </a:rPr>
-                        <a:t>The escalation</a:t>
+                        <a:t>Q12 — fastest unblock</a:t>
                       </a:r>
                     </a:p>
                   </a:txBody>
@@ -6838,7 +6838,7 @@
                 </a:solidFill>
                 <a:latin typeface="Segoe UI"/>
               </a:rPr>
-              <a:t>Guardrail until then: do not change Conditional Access, do not allowlist the AWS egress IPs, and do not mandate On-Behalf-Of.</a:t>
+              <a:t>Guardrail until then: do not change Conditional Access, do not allowlist the AWS egress IPs, do not mandate On-Behalf-Of, and do not generalise any of this to Conseiller.</a:t>
             </a:r>
           </a:p>
         </p:txBody>
@@ -7010,7 +7010,7 @@
                 <a:latin typeface="Segoe UI"/>
                 <a:hlinkClick r:id="rId2"/>
               </a:rPr>
-              <a:t>▶  Question list Q1–Q9 (escalation packet)</a:t>
+              <a:t>▶  Session findings and all eight routes — START HERE</a:t>
             </a:r>
           </a:p>
         </p:txBody>
@@ -7042,7 +7042,7 @@
                 <a:latin typeface="Segoe UI"/>
                 <a:hlinkClick r:id="rId3"/>
               </a:rPr>
-              <a:t>▶  Escalation packet — full document</a:t>
+              <a:t>▶  Routes and workarounds (R1–R8)</a:t>
             </a:r>
           </a:p>
         </p:txBody>
@@ -7074,7 +7074,7 @@
                 <a:latin typeface="Segoe UI"/>
                 <a:hlinkClick r:id="rId4"/>
               </a:rPr>
-              <a:t>▶  Full analysis — README</a:t>
+              <a:t>▶  Question list Q1–Q14 (escalation packet)</a:t>
             </a:r>
           </a:p>
         </p:txBody>
@@ -7106,7 +7106,7 @@
                 <a:latin typeface="Segoe UI"/>
                 <a:hlinkClick r:id="rId5"/>
               </a:rPr>
-              <a:t>▶  Who can capture the /token Origin header</a:t>
+              <a:t>▶  Escalation packet — full document</a:t>
             </a:r>
           </a:p>
         </p:txBody>
@@ -7138,7 +7138,7 @@
                 <a:latin typeface="Segoe UI"/>
                 <a:hlinkClick r:id="rId6"/>
               </a:rPr>
-              <a:t>▶  Evidence narrative — question-by-question mapping</a:t>
+              <a:t>▶  Full analysis — README</a:t>
             </a:r>
           </a:p>
         </p:txBody>
@@ -7170,7 +7170,7 @@
                 <a:latin typeface="Segoe UI"/>
                 <a:hlinkClick r:id="rId7"/>
               </a:rPr>
-              <a:t>▶  On-Behalf-Of demo guide</a:t>
+              <a:t>▶  Who can capture the /token Origin header</a:t>
             </a:r>
           </a:p>
         </p:txBody>
@@ -7202,7 +7202,7 @@
                 <a:latin typeface="Segoe UI"/>
                 <a:hlinkClick r:id="rId8"/>
               </a:rPr>
-              <a:t>▶  Evidence KQL queries</a:t>
+              <a:t>▶  Evidence narrative — question-by-question mapping</a:t>
             </a:r>
           </a:p>
         </p:txBody>
@@ -7234,7 +7234,7 @@
                 <a:latin typeface="Segoe UI"/>
                 <a:hlinkClick r:id="rId9"/>
               </a:rPr>
-              <a:t>▶  Repository — devopsabcs-engineering/croesus</a:t>
+              <a:t>▶  On-Behalf-Of demo guide</a:t>
             </a:r>
           </a:p>
         </p:txBody>
@@ -7265,6 +7265,38 @@
               <a:rPr sz="1600" b="1">
                 <a:latin typeface="Segoe UI"/>
                 <a:hlinkClick r:id="rId10"/>
+              </a:rPr>
+              <a:t>▶  Evidence KQL queries</a:t>
+            </a:r>
+          </a:p>
+        </p:txBody>
+      </p:sp>
+      <p:sp>
+        <p:nvSpPr>
+          <p:cNvPr id="14" name="TextBox 13"/>
+          <p:cNvSpPr txBox="1"/>
+          <p:nvPr/>
+        </p:nvSpPr>
+        <p:spPr>
+          <a:xfrm>
+            <a:off x="777240" y="5989320"/>
+            <a:ext cx="10515600" cy="384048"/>
+          </a:xfrm>
+          <a:prstGeom prst="rect">
+            <a:avLst/>
+          </a:prstGeom>
+          <a:noFill/>
+        </p:spPr>
+        <p:txBody>
+          <a:bodyPr wrap="square">
+            <a:spAutoFit/>
+          </a:bodyPr>
+          <a:lstStyle/>
+          <a:p>
+            <a:r>
+              <a:rPr sz="1600" b="1">
+                <a:latin typeface="Segoe UI"/>
+                <a:hlinkClick r:id="rId11"/>
               </a:rPr>
               <a:t>▶  Live demo application</a:t>
             </a:r>
@@ -7789,7 +7821,7 @@
                 </a:solidFill>
                 <a:latin typeface="Segoe UI"/>
               </a:rPr>
-              <a:t>The Conditional Access block is </a:t>
+              <a:t>Central is a </a:t>
             </a:r>
             <a:r>
               <a:rPr sz="1700" b="1">
@@ -7798,7 +7830,7 @@
                 </a:solidFill>
                 <a:latin typeface="Segoe UI"/>
               </a:rPr>
-              <a:t>correct-by-design</a:t>
+              <a:t>server-rendered multi-page application</a:t>
             </a:r>
             <a:r>
               <a:rPr sz="1700" b="0">
@@ -7807,7 +7839,7 @@
                 </a:solidFill>
                 <a:latin typeface="Segoe UI"/>
               </a:rPr>
-              <a:t>. CA reacts to the origin and context of the request, not to the grant type.</a:t>
+              <a:t> — ~130 .aspx pages on .NET Framework 4.5.2. Vendor-confirmed. It is not a browser SPA.</a:t>
             </a:r>
           </a:p>
           <a:p>
@@ -7832,7 +7864,7 @@
                 </a:solidFill>
                 <a:latin typeface="Segoe UI"/>
               </a:rPr>
-              <a:t>The /token redemption is now </a:t>
+              <a:t>So the ‘spa’ platform on the three registrations is a </a:t>
             </a:r>
             <a:r>
               <a:rPr sz="1700" b="1">
@@ -7841,7 +7873,7 @@
                 </a:solidFill>
                 <a:latin typeface="Segoe UI"/>
               </a:rPr>
-              <a:t>confirmed server-side</a:t>
+              <a:t>type mismatch</a:t>
             </a:r>
             <a:r>
               <a:rPr sz="1700" b="0">
@@ -7850,7 +7882,7 @@
                 </a:solidFill>
                 <a:latin typeface="Segoe UI"/>
               </a:rPr>
-              <a:t> — a Desjardins browser trace shows /authorize but no /token. This corroborates Croesus.</a:t>
+              <a:t>, not a description. Central is already a Backend-for-Frontend; ‘web’ is the platform that says so.</a:t>
             </a:r>
           </a:p>
           <a:p>
@@ -7875,7 +7907,7 @@
                 </a:solidFill>
                 <a:latin typeface="Segoe UI"/>
               </a:rPr>
-              <a:t>The grant is </a:t>
+              <a:t>Central works in Prod, so the server-side redemption is </a:t>
             </a:r>
             <a:r>
               <a:rPr sz="1700" b="1">
@@ -7884,7 +7916,7 @@
                 </a:solidFill>
                 <a:latin typeface="Segoe UI"/>
               </a:rPr>
-              <a:t>still not classified</a:t>
+              <a:t>succeeding</a:t>
             </a:r>
             <a:r>
               <a:rPr sz="1700" b="0">
@@ -7893,7 +7925,16 @@
                 </a:solidFill>
                 <a:latin typeface="Segoe UI"/>
               </a:rPr>
-              <a:t> from a captured request. /token is the normal endpoint for code redemption and refresh — it is not evidence of On-Behalf-Of.</a:t>
+              <a:t> against registrations Entra should reject. Only two explanations survive — a synthesised Origin header, or an undisclosed ‘web’ registration. </a:t>
+            </a:r>
+            <a:r>
+              <a:rPr sz="1700" b="1">
+                <a:solidFill>
+                  <a:srgbClr val="1A1A1A"/>
+                </a:solidFill>
+                <a:latin typeface="Segoe UI"/>
+              </a:rPr>
+              <a:t>Q8 is the primary ask.</a:t>
             </a:r>
           </a:p>
           <a:p>
@@ -7918,7 +7959,7 @@
                 </a:solidFill>
                 <a:latin typeface="Segoe UI"/>
               </a:rPr>
-              <a:t>The “Unbound (1008)” line is a </a:t>
+              <a:t>The prod/non-prod split is </a:t>
             </a:r>
             <a:r>
               <a:rPr sz="1700" b="1">
@@ -7927,7 +7968,7 @@
                 </a:solidFill>
                 <a:latin typeface="Segoe UI"/>
               </a:rPr>
-              <a:t>device- and session-binding status</a:t>
+              <a:t>not yet explained</a:t>
             </a:r>
             <a:r>
               <a:rPr sz="1700" b="0">
@@ -7936,7 +7977,7 @@
                 </a:solidFill>
                 <a:latin typeface="Segoe UI"/>
               </a:rPr>
-              <a:t>, not proof of token replay and not a grant classifier.</a:t>
+              <a:t> — the blocked leg carries no device context in either tenant. Desjardins can settle this alone, this week.</a:t>
             </a:r>
           </a:p>
           <a:p>
@@ -7961,7 +8002,7 @@
                 </a:solidFill>
                 <a:latin typeface="Segoe UI"/>
               </a:rPr>
-              <a:t>Next: resolve the fork with </a:t>
+              <a:t>The Conditional Access block is </a:t>
             </a:r>
             <a:r>
               <a:rPr sz="1700" b="1">
@@ -7970,7 +8011,7 @@
                 </a:solidFill>
                 <a:latin typeface="Segoe UI"/>
               </a:rPr>
-              <a:t>Q7 and Q8</a:t>
+              <a:t>correct-by-design</a:t>
             </a:r>
             <a:r>
               <a:rPr sz="1700" b="0">
@@ -7979,7 +8020,7 @@
                 </a:solidFill>
                 <a:latin typeface="Segoe UI"/>
               </a:rPr>
-              <a:t>. Change nothing in Conditional Access until then.</a:t>
+              <a:t>. The “Unbound (1008)” line is a binding status, not proof of replay and not a grant classifier.</a:t>
             </a:r>
           </a:p>
         </p:txBody>
@@ -9148,7 +9189,7 @@
                 </a:solidFill>
                 <a:latin typeface="Segoe UI"/>
               </a:rPr>
-              <a:t>HYPOTHESIS TO VERIFY</a:t>
+              <a:t>WHAT FOLLOWS FROM IT</a:t>
             </a:r>
           </a:p>
         </p:txBody>
@@ -9183,7 +9224,7 @@
                 </a:solidFill>
                 <a:latin typeface="Segoe UI"/>
               </a:rPr>
-              <a:t>The fork this creates</a:t>
+              <a:t>The type mismatch, and the two explanations left</a:t>
             </a:r>
           </a:p>
         </p:txBody>
@@ -9262,7 +9303,7 @@
                 </a:solidFill>
                 <a:latin typeface="Segoe UI"/>
               </a:rPr>
-              <a:t>Microsoft Entra rejects a plain server-side redemption of a ‘spa’ authorization code with AADSTS9002327. A server-side redemption and a spa-only registration cannot both hold.</a:t>
+              <a:t>Entra rejects a plain server-side redemption of a ‘spa’ authorization code with AADSTS9002327. Central works in Prod, so the redemption is succeeding. Exactly two explanations survive.</a:t>
             </a:r>
           </a:p>
         </p:txBody>
@@ -9385,7 +9426,7 @@
                 </a:solidFill>
                 <a:latin typeface="Segoe UI"/>
               </a:rPr>
-              <a:t>Branch A — the redemption FAILS</a:t>
+              <a:t>1 — A synthesised Origin header</a:t>
             </a:r>
           </a:p>
         </p:txBody>
@@ -9424,7 +9465,7 @@
                 </a:solidFill>
                 <a:latin typeface="Segoe UI"/>
               </a:rPr>
-              <a:t>Entra returns AADSTS9002327.</a:t>
+              <a:t>A server-to-server POST sets no Origin of its own.</a:t>
             </a:r>
           </a:p>
           <a:p>
@@ -9440,7 +9481,7 @@
                 </a:solidFill>
                 <a:latin typeface="Segoe UI"/>
               </a:rPr>
-              <a:t>A spa public client cannot service a no-Origin redemption. The supported registration shape is missing.</a:t>
+              <a:t>If one is present, application code is adding it — and a spa-typed code is surviving a rule Entra wrote to reject it.</a:t>
             </a:r>
           </a:p>
           <a:p>
@@ -9456,7 +9497,7 @@
                 </a:solidFill>
                 <a:latin typeface="Segoe UI"/>
               </a:rPr>
-              <a:t>Fix: Croesus registers a ‘web’ confidential client with a certificate credential.</a:t>
+              <a:t>Fix: register Central as a ‘web’ confidential client. Prove it with a client secret — no library, no framework uplift — then harden with a certificate.</a:t>
             </a:r>
           </a:p>
         </p:txBody>
@@ -9579,7 +9620,7 @@
                 </a:solidFill>
                 <a:latin typeface="Segoe UI"/>
               </a:rPr>
-              <a:t>Branch B — the redemption SUCCEEDS</a:t>
+              <a:t>2 — An undisclosed ‘web’ registration</a:t>
             </a:r>
           </a:p>
         </p:txBody>
@@ -9618,7 +9659,7 @@
                 </a:solidFill>
                 <a:latin typeface="Segoe UI"/>
               </a:rPr>
-              <a:t>No AADSTS9002327 in the logs.</a:t>
+              <a:t>The backend authenticates as something outside our three exports.</a:t>
             </a:r>
           </a:p>
           <a:p>
@@ -9634,7 +9675,7 @@
                 </a:solidFill>
                 <a:latin typeface="Segoe UI"/>
               </a:rPr>
-              <a:t>Then the backend authenticates as a registration outside the three spa exports we were given.</a:t>
+              <a:t>Then the shape is already correct and we have simply never been shown it.</a:t>
             </a:r>
           </a:p>
           <a:p>
@@ -9685,7 +9726,7 @@
                 </a:solidFill>
                 <a:latin typeface="Segoe UI"/>
               </a:rPr>
-              <a:t>Caveat: if Conditional Access blocks the leg first, the logs show a CA failure code instead — that does not settle the question.</a:t>
+              <a:t>Separately, and still open: the blocked leg carries no device context in EITHER tenant, yet Prod passes. That is Desjardins’ to settle from its own policy inventory and sign-in logs.</a:t>
             </a:r>
           </a:p>
         </p:txBody>
@@ -9840,7 +9881,7 @@
         </p:nvGraphicFramePr>
         <p:xfrm>
           <a:off x="685800" y="1920240"/>
-          <a:ext cx="10835640" cy="3703320"/>
+          <a:ext cx="10835640" cy="4361688"/>
         </p:xfrm>
         <a:graphic>
           <a:graphicData uri="http://schemas.openxmlformats.org/drawingml/2006/table">
@@ -9853,7 +9894,7 @@
                 <a:gridCol w="4206240"/>
                 <a:gridCol w="4160520"/>
               </a:tblGrid>
-              <a:tr h="617220">
+              <a:tr h="623098">
                 <a:tc>
                   <a:txBody>
                     <a:bodyPr/>
@@ -9921,7 +9962,7 @@
                   </a:tcPr>
                 </a:tc>
               </a:tr>
-              <a:tr h="617220">
+              <a:tr h="623098">
                 <a:tc>
                   <a:txBody>
                     <a:bodyPr/>
@@ -9934,7 +9975,7 @@
                           </a:solidFill>
                           <a:latin typeface="Segoe UI"/>
                         </a:rPr>
-                        <a:t>Credential</a:t>
+                        <a:t>Describes</a:t>
                       </a:r>
                     </a:p>
                   </a:txBody>
@@ -9956,7 +9997,7 @@
                           </a:solidFill>
                           <a:latin typeface="Segoe UI"/>
                         </a:rPr>
-                        <a:t>None — no secret, no certificate</a:t>
+                        <a:t>A browser public client</a:t>
                       </a:r>
                     </a:p>
                   </a:txBody>
@@ -9978,7 +10019,7 @@
                           </a:solidFill>
                           <a:latin typeface="Segoe UI"/>
                         </a:rPr>
-                        <a:t>Secret or certificate required</a:t>
+                        <a:t>A server-rendered web app / BFF</a:t>
                       </a:r>
                     </a:p>
                   </a:txBody>
@@ -9989,7 +10030,7 @@
                   </a:tcPr>
                 </a:tc>
               </a:tr>
-              <a:tr h="617220">
+              <a:tr h="623098">
                 <a:tc>
                   <a:txBody>
                     <a:bodyPr/>
@@ -10002,7 +10043,7 @@
                           </a:solidFill>
                           <a:latin typeface="Segoe UI"/>
                         </a:rPr>
-                        <a:t>Redeems a code</a:t>
+                        <a:t>Credential</a:t>
                       </a:r>
                     </a:p>
                   </a:txBody>
@@ -10024,7 +10065,7 @@
                           </a:solidFill>
                           <a:latin typeface="Segoe UI"/>
                         </a:rPr>
-                        <a:t>Only from a cross-origin browser request (Origin header)</a:t>
+                        <a:t>None — no secret, no certificate</a:t>
                       </a:r>
                     </a:p>
                   </a:txBody>
@@ -10046,7 +10087,7 @@
                           </a:solidFill>
                           <a:latin typeface="Segoe UI"/>
                         </a:rPr>
-                        <a:t>From a server, no Origin required</a:t>
+                        <a:t>Secret or certificate required</a:t>
                       </a:r>
                     </a:p>
                   </a:txBody>
@@ -10057,7 +10098,7 @@
                   </a:tcPr>
                 </a:tc>
               </a:tr>
-              <a:tr h="617220">
+              <a:tr h="623098">
                 <a:tc>
                   <a:txBody>
                     <a:bodyPr/>
@@ -10070,7 +10111,7 @@
                           </a:solidFill>
                           <a:latin typeface="Segoe UI"/>
                         </a:rPr>
-                        <a:t>Server-side redemption</a:t>
+                        <a:t>Redeems a code</a:t>
                       </a:r>
                     </a:p>
                   </a:txBody>
@@ -10092,7 +10133,7 @@
                           </a:solidFill>
                           <a:latin typeface="Segoe UI"/>
                         </a:rPr>
-                        <a:t>Rejected: AADSTS9002327</a:t>
+                        <a:t>Only from a cross-origin browser request (Origin header)</a:t>
                       </a:r>
                     </a:p>
                   </a:txBody>
@@ -10114,7 +10155,7 @@
                           </a:solidFill>
                           <a:latin typeface="Segoe UI"/>
                         </a:rPr>
-                        <a:t>Supported</a:t>
+                        <a:t>From a server, no Origin required</a:t>
                       </a:r>
                     </a:p>
                   </a:txBody>
@@ -10125,7 +10166,7 @@
                   </a:tcPr>
                 </a:tc>
               </a:tr>
-              <a:tr h="617220">
+              <a:tr h="623098">
                 <a:tc>
                   <a:txBody>
                     <a:bodyPr/>
@@ -10138,7 +10179,7 @@
                           </a:solidFill>
                           <a:latin typeface="Segoe UI"/>
                         </a:rPr>
-                        <a:t>Exposed API scope</a:t>
+                        <a:t>Server-side redemption</a:t>
                       </a:r>
                     </a:p>
                   </a:txBody>
@@ -10160,7 +10201,7 @@
                           </a:solidFill>
                           <a:latin typeface="Segoe UI"/>
                         </a:rPr>
-                        <a:t>None in the three exports</a:t>
+                        <a:t>Rejected: AADSTS9002327</a:t>
                       </a:r>
                     </a:p>
                   </a:txBody>
@@ -10182,7 +10223,7 @@
                           </a:solidFill>
                           <a:latin typeface="Segoe UI"/>
                         </a:rPr>
-                        <a:t>Required for On-Behalf-Of</a:t>
+                        <a:t>Supported</a:t>
                       </a:r>
                     </a:p>
                   </a:txBody>
@@ -10193,7 +10234,7 @@
                   </a:tcPr>
                 </a:tc>
               </a:tr>
-              <a:tr h="617220">
+              <a:tr h="623098">
                 <a:tc>
                   <a:txBody>
                     <a:bodyPr/>
@@ -10206,7 +10247,7 @@
                           </a:solidFill>
                           <a:latin typeface="Segoe UI"/>
                         </a:rPr>
-                        <a:t>What we hold today</a:t>
+                        <a:t>Refresh token lifetime</a:t>
                       </a:r>
                     </a:p>
                   </a:txBody>
@@ -10228,7 +10269,7 @@
                           </a:solidFill>
                           <a:latin typeface="Segoe UI"/>
                         </a:rPr>
-                        <a:t>All three: dev-dev, dev-prod, prod-prod</a:t>
+                        <a:t>Capped at 24 hours, non-sliding</a:t>
                       </a:r>
                     </a:p>
                   </a:txBody>
@@ -10250,13 +10291,81 @@
                           </a:solidFill>
                           <a:latin typeface="Segoe UI"/>
                         </a:rPr>
-                        <a:t>None disclosed</a:t>
+                        <a:t>Not capped that way</a:t>
                       </a:r>
                     </a:p>
                   </a:txBody>
                   <a:tcPr anchor="ctr">
                     <a:solidFill>
                       <a:srgbClr val="FFFFFF"/>
+                    </a:solidFill>
+                  </a:tcPr>
+                </a:tc>
+              </a:tr>
+              <a:tr h="623100">
+                <a:tc>
+                  <a:txBody>
+                    <a:bodyPr/>
+                    <a:lstStyle/>
+                    <a:p>
+                      <a:r>
+                        <a:rPr sz="1400">
+                          <a:solidFill>
+                            <a:srgbClr val="1A1A1A"/>
+                          </a:solidFill>
+                          <a:latin typeface="Segoe UI"/>
+                        </a:rPr>
+                        <a:t>What Central actually is</a:t>
+                      </a:r>
+                    </a:p>
+                  </a:txBody>
+                  <a:tcPr anchor="ctr">
+                    <a:solidFill>
+                      <a:srgbClr val="F2F6FA"/>
+                    </a:solidFill>
+                  </a:tcPr>
+                </a:tc>
+                <a:tc>
+                  <a:txBody>
+                    <a:bodyPr/>
+                    <a:lstStyle/>
+                    <a:p>
+                      <a:r>
+                        <a:rPr sz="1400">
+                          <a:solidFill>
+                            <a:srgbClr val="1A1A1A"/>
+                          </a:solidFill>
+                          <a:latin typeface="Segoe UI"/>
+                        </a:rPr>
+                        <a:t>Not this</a:t>
+                      </a:r>
+                    </a:p>
+                  </a:txBody>
+                  <a:tcPr anchor="ctr">
+                    <a:solidFill>
+                      <a:srgbClr val="F2F6FA"/>
+                    </a:solidFill>
+                  </a:tcPr>
+                </a:tc>
+                <a:tc>
+                  <a:txBody>
+                    <a:bodyPr/>
+                    <a:lstStyle/>
+                    <a:p>
+                      <a:r>
+                        <a:rPr sz="1400">
+                          <a:solidFill>
+                            <a:srgbClr val="1A1A1A"/>
+                          </a:solidFill>
+                          <a:latin typeface="Segoe UI"/>
+                        </a:rPr>
+                        <a:t>This — ~130 .aspx pages</a:t>
+                      </a:r>
+                    </a:p>
+                  </a:txBody>
+                  <a:tcPr anchor="ctr">
+                    <a:solidFill>
+                      <a:srgbClr val="F2F6FA"/>
                     </a:solidFill>
                   </a:tcPr>
                 </a:tc>
@@ -10391,7 +10500,7 @@
                 </a:solidFill>
                 <a:latin typeface="Segoe UI"/>
               </a:rPr>
-              <a:t>The same fork, live in the demo</a:t>
+              <a:t>The same mismatch, live in the demo</a:t>
             </a:r>
           </a:p>
         </p:txBody>
@@ -10740,7 +10849,7 @@
                           </a:solidFill>
                           <a:latin typeface="Segoe UI"/>
                         </a:rPr>
-                        <a:t>Origin header on a browser-side /token call</a:t>
+                        <a:t>Complete registration / service-principal inventory</a:t>
                       </a:r>
                     </a:p>
                   </a:txBody>
@@ -10762,7 +10871,7 @@
                           </a:solidFill>
                           <a:latin typeface="Segoe UI"/>
                         </a:rPr>
-                        <a:t>Desjardins — browser DevTools</a:t>
+                        <a:t>Croesus</a:t>
                       </a:r>
                     </a:p>
                   </a:txBody>
@@ -10784,7 +10893,7 @@
                           </a:solidFill>
                           <a:latin typeface="Segoe UI"/>
                         </a:rPr>
-                        <a:t>Ruled out — no /token in the HAR</a:t>
+                        <a:t>OPEN — Q8, the primary ask</a:t>
                       </a:r>
                     </a:p>
                   </a:txBody>
@@ -10876,143 +10985,7 @@
                           </a:solidFill>
                           <a:latin typeface="Segoe UI"/>
                         </a:rPr>
-                        <a:t>Did the second leg succeed or fail with AADSTS9002327?</a:t>
-                      </a:r>
-                    </a:p>
-                  </a:txBody>
-                  <a:tcPr anchor="ctr">
-                    <a:solidFill>
-                      <a:srgbClr val="FFFFFF"/>
-                    </a:solidFill>
-                  </a:tcPr>
-                </a:tc>
-                <a:tc>
-                  <a:txBody>
-                    <a:bodyPr/>
-                    <a:lstStyle/>
-                    <a:p>
-                      <a:r>
-                        <a:rPr sz="1300">
-                          <a:solidFill>
-                            <a:srgbClr val="1A1A1A"/>
-                          </a:solidFill>
-                          <a:latin typeface="Segoe UI"/>
-                        </a:rPr>
-                        <a:t>Desjardins — own Entra sign-in logs</a:t>
-                      </a:r>
-                    </a:p>
-                  </a:txBody>
-                  <a:tcPr anchor="ctr">
-                    <a:solidFill>
-                      <a:srgbClr val="FFFFFF"/>
-                    </a:solidFill>
-                  </a:tcPr>
-                </a:tc>
-                <a:tc>
-                  <a:txBody>
-                    <a:bodyPr/>
-                    <a:lstStyle/>
-                    <a:p>
-                      <a:r>
-                        <a:rPr sz="1300">
-                          <a:solidFill>
-                            <a:srgbClr val="1A1A1A"/>
-                          </a:solidFill>
-                          <a:latin typeface="Segoe UI"/>
-                        </a:rPr>
-                        <a:t>In progress</a:t>
-                      </a:r>
-                    </a:p>
-                  </a:txBody>
-                  <a:tcPr anchor="ctr">
-                    <a:solidFill>
-                      <a:srgbClr val="FFFFFF"/>
-                    </a:solidFill>
-                  </a:tcPr>
-                </a:tc>
-              </a:tr>
-              <a:tr h="617220">
-                <a:tc>
-                  <a:txBody>
-                    <a:bodyPr/>
-                    <a:lstStyle/>
-                    <a:p>
-                      <a:r>
-                        <a:rPr sz="1300">
-                          <a:solidFill>
-                            <a:srgbClr val="1A1A1A"/>
-                          </a:solidFill>
-                          <a:latin typeface="Segoe UI"/>
-                        </a:rPr>
-                        <a:t>Complete registration / service-principal inventory</a:t>
-                      </a:r>
-                    </a:p>
-                  </a:txBody>
-                  <a:tcPr anchor="ctr">
-                    <a:solidFill>
-                      <a:srgbClr val="F2F6FA"/>
-                    </a:solidFill>
-                  </a:tcPr>
-                </a:tc>
-                <a:tc>
-                  <a:txBody>
-                    <a:bodyPr/>
-                    <a:lstStyle/>
-                    <a:p>
-                      <a:r>
-                        <a:rPr sz="1300">
-                          <a:solidFill>
-                            <a:srgbClr val="1A1A1A"/>
-                          </a:solidFill>
-                          <a:latin typeface="Segoe UI"/>
-                        </a:rPr>
-                        <a:t>Croesus</a:t>
-                      </a:r>
-                    </a:p>
-                  </a:txBody>
-                  <a:tcPr anchor="ctr">
-                    <a:solidFill>
-                      <a:srgbClr val="F2F6FA"/>
-                    </a:solidFill>
-                  </a:tcPr>
-                </a:tc>
-                <a:tc>
-                  <a:txBody>
-                    <a:bodyPr/>
-                    <a:lstStyle/>
-                    <a:p>
-                      <a:r>
-                        <a:rPr sz="1300">
-                          <a:solidFill>
-                            <a:srgbClr val="1A1A1A"/>
-                          </a:solidFill>
-                          <a:latin typeface="Segoe UI"/>
-                        </a:rPr>
-                        <a:t>Open — Q8</a:t>
-                      </a:r>
-                    </a:p>
-                  </a:txBody>
-                  <a:tcPr anchor="ctr">
-                    <a:solidFill>
-                      <a:srgbClr val="F2F6FA"/>
-                    </a:solidFill>
-                  </a:tcPr>
-                </a:tc>
-              </a:tr>
-              <a:tr h="617220">
-                <a:tc>
-                  <a:txBody>
-                    <a:bodyPr/>
-                    <a:lstStyle/>
-                    <a:p>
-                      <a:r>
-                        <a:rPr sz="1300">
-                          <a:solidFill>
-                            <a:srgbClr val="1A1A1A"/>
-                          </a:solidFill>
-                          <a:latin typeface="Segoe UI"/>
-                        </a:rPr>
-                        <a:t>AWS egress IP ranges, intended flow definition</a:t>
+                        <a:t>Which auth library, and any .NET uplift on the roadmap</a:t>
                       </a:r>
                     </a:p>
                   </a:txBody>
@@ -11056,7 +11029,143 @@
                           </a:solidFill>
                           <a:latin typeface="Segoe UI"/>
                         </a:rPr>
-                        <a:t>Open — Q4, Q1</a:t>
+                        <a:t>Open — Q13</a:t>
+                      </a:r>
+                    </a:p>
+                  </a:txBody>
+                  <a:tcPr anchor="ctr">
+                    <a:solidFill>
+                      <a:srgbClr val="FFFFFF"/>
+                    </a:solidFill>
+                  </a:tcPr>
+                </a:tc>
+              </a:tr>
+              <a:tr h="617220">
+                <a:tc>
+                  <a:txBody>
+                    <a:bodyPr/>
+                    <a:lstStyle/>
+                    <a:p>
+                      <a:r>
+                        <a:rPr sz="1300">
+                          <a:solidFill>
+                            <a:srgbClr val="1A1A1A"/>
+                          </a:solidFill>
+                          <a:latin typeface="Segoe UI"/>
+                        </a:rPr>
+                        <a:t>How Prod and non-prod scope CA for Central</a:t>
+                      </a:r>
+                    </a:p>
+                  </a:txBody>
+                  <a:tcPr anchor="ctr">
+                    <a:solidFill>
+                      <a:srgbClr val="F2F6FA"/>
+                    </a:solidFill>
+                  </a:tcPr>
+                </a:tc>
+                <a:tc>
+                  <a:txBody>
+                    <a:bodyPr/>
+                    <a:lstStyle/>
+                    <a:p>
+                      <a:r>
+                        <a:rPr sz="1300">
+                          <a:solidFill>
+                            <a:srgbClr val="1A1A1A"/>
+                          </a:solidFill>
+                          <a:latin typeface="Segoe UI"/>
+                        </a:rPr>
+                        <a:t>Desjardins — own policy inventory</a:t>
+                      </a:r>
+                    </a:p>
+                  </a:txBody>
+                  <a:tcPr anchor="ctr">
+                    <a:solidFill>
+                      <a:srgbClr val="F2F6FA"/>
+                    </a:solidFill>
+                  </a:tcPr>
+                </a:tc>
+                <a:tc>
+                  <a:txBody>
+                    <a:bodyPr/>
+                    <a:lstStyle/>
+                    <a:p>
+                      <a:r>
+                        <a:rPr sz="1300">
+                          <a:solidFill>
+                            <a:srgbClr val="1A1A1A"/>
+                          </a:solidFill>
+                          <a:latin typeface="Segoe UI"/>
+                        </a:rPr>
+                        <a:t>In progress — highest value</a:t>
+                      </a:r>
+                    </a:p>
+                  </a:txBody>
+                  <a:tcPr anchor="ctr">
+                    <a:solidFill>
+                      <a:srgbClr val="F2F6FA"/>
+                    </a:solidFill>
+                  </a:tcPr>
+                </a:tc>
+              </a:tr>
+              <a:tr h="617220">
+                <a:tc>
+                  <a:txBody>
+                    <a:bodyPr/>
+                    <a:lstStyle/>
+                    <a:p>
+                      <a:r>
+                        <a:rPr sz="1300">
+                          <a:solidFill>
+                            <a:srgbClr val="1A1A1A"/>
+                          </a:solidFill>
+                          <a:latin typeface="Segoe UI"/>
+                        </a:rPr>
+                        <a:t>Origin header on a browser-side /token call</a:t>
+                      </a:r>
+                    </a:p>
+                  </a:txBody>
+                  <a:tcPr anchor="ctr">
+                    <a:solidFill>
+                      <a:srgbClr val="FFFFFF"/>
+                    </a:solidFill>
+                  </a:tcPr>
+                </a:tc>
+                <a:tc>
+                  <a:txBody>
+                    <a:bodyPr/>
+                    <a:lstStyle/>
+                    <a:p>
+                      <a:r>
+                        <a:rPr sz="1300">
+                          <a:solidFill>
+                            <a:srgbClr val="1A1A1A"/>
+                          </a:solidFill>
+                          <a:latin typeface="Segoe UI"/>
+                        </a:rPr>
+                        <a:t>Desjardins — browser DevTools</a:t>
+                      </a:r>
+                    </a:p>
+                  </a:txBody>
+                  <a:tcPr anchor="ctr">
+                    <a:solidFill>
+                      <a:srgbClr val="FFFFFF"/>
+                    </a:solidFill>
+                  </a:tcPr>
+                </a:tc>
+                <a:tc>
+                  <a:txBody>
+                    <a:bodyPr/>
+                    <a:lstStyle/>
+                    <a:p>
+                      <a:r>
+                        <a:rPr sz="1300">
+                          <a:solidFill>
+                            <a:srgbClr val="1A1A1A"/>
+                          </a:solidFill>
+                          <a:latin typeface="Segoe UI"/>
+                        </a:rPr>
+                        <a:t>Ruled out — no /token in the HAR</a:t>
                       </a:r>
                     </a:p>
                   </a:txBody>

--- a/docs/deck/croesus-session-deck.pptx
+++ b/docs/deck/croesus-session-deck.pptx
@@ -725,7 +725,7 @@
           <a:lstStyle/>
           <a:p>
             <a:r>
-              <a:t>Demo order: sign in, Call API, show the evidence panel, then the replay button, then scroll to the registration-fork panel and click through to Q7/Q8.</a:t>
+              <a:t>Demo order: sign in, Call API, show the evidence panel, then the replay button, then scroll to the registration-fork panel and click through to Q7/Q8/Q15.</a:t>
             </a:r>
           </a:p>
         </p:txBody>
@@ -1355,7 +1355,7 @@
           <a:lstStyle/>
           <a:p>
             <a:r>
-              <a:t>The panel renders without signing in, so it can be walked through on screen share. Q7, Q8, and the full question list are clickable straight from the page.</a:t>
+              <a:t>The panel renders without signing in, so it can be walked through on screen share. Q7, Q8, Q15, and the full question list are clickable straight from the page.</a:t>
             </a:r>
           </a:p>
         </p:txBody>
@@ -4651,7 +4651,7 @@
                 <a:latin typeface="Segoe UI"/>
                 <a:hlinkClick r:id="rId2"/>
               </a:rPr>
-              <a:t>▶  Session findings and all eight routes</a:t>
+              <a:t>▶  Session findings and all nine routes</a:t>
             </a:r>
           </a:p>
         </p:txBody>
@@ -4683,7 +4683,7 @@
                 <a:latin typeface="Segoe UI"/>
                 <a:hlinkClick r:id="rId3"/>
               </a:rPr>
-              <a:t>▶  Question list (Q1–Q14) on GitHub</a:t>
+              <a:t>▶  Question list (Q1–Q15) on GitHub</a:t>
             </a:r>
           </a:p>
         </p:txBody>
@@ -5278,7 +5278,7 @@
                 </a:solidFill>
                 <a:latin typeface="Segoe UI"/>
               </a:rPr>
-              <a:t>Also open: Q13 auth library and .NET roadmap  •  Q10 sizing of the change  •  Q12 route Entra calls over the existing site-to-site VPN  •  Q4 AWS egress ranges  •  Q9 does Conseiller share anything with Central?</a:t>
+              <a:t>Also open: Q15 UI and BFF evidence  •  Q13 auth library and .NET roadmap  •  Q10 sizing of the change  •  Q12 route Entra calls over the existing site-to-site VPN  •  Q4 AWS egress ranges  •  Q9 does Conseiller share anything with Central?</a:t>
             </a:r>
           </a:p>
         </p:txBody>
@@ -5310,7 +5310,7 @@
                 <a:latin typeface="Segoe UI"/>
                 <a:hlinkClick r:id="rId2"/>
               </a:rPr>
-              <a:t>▶  Full question list Q1–Q14 on GitHub →</a:t>
+              <a:t>▶  Full question list Q1–Q15 on GitHub →</a:t>
             </a:r>
           </a:p>
         </p:txBody>
@@ -5371,7 +5371,7 @@
                 </a:solidFill>
                 <a:latin typeface="Segoe UI"/>
               </a:rPr>
-              <a:t>EIGHT ROUTES, RANKED</a:t>
+              <a:t>NINE ROUTES, RANKED</a:t>
             </a:r>
           </a:p>
         </p:txBody>
@@ -5890,7 +5890,7 @@
                 </a:solidFill>
                 <a:latin typeface="Segoe UI"/>
               </a:rPr>
-              <a:t>The registration mismatch:</a:t>
+              <a:t>The registration fork:</a:t>
             </a:r>
             <a:r>
               <a:rPr sz="1600" b="0">
@@ -5899,7 +5899,7 @@
                 </a:solidFill>
                 <a:latin typeface="Segoe UI"/>
               </a:rPr>
-              <a:t> a panel walks through spa vs web and the AADSTS9002327 behaviour, with direct links to Q8 and Q7.</a:t>
+              <a:t> a panel separates UI topology from the redeemer decision, with direct links to Q8, Q7, and Q15.</a:t>
             </a:r>
           </a:p>
           <a:p>
@@ -6250,7 +6250,7 @@
         </p:nvGraphicFramePr>
         <p:xfrm>
           <a:off x="685800" y="1920240"/>
-          <a:ext cx="10835640" cy="3703320"/>
+          <a:ext cx="10835640" cy="4361688"/>
         </p:xfrm>
         <a:graphic>
           <a:graphicData uri="http://schemas.openxmlformats.org/drawingml/2006/table">
@@ -6264,7 +6264,7 @@
                 <a:gridCol w="1737360"/>
                 <a:gridCol w="3611880"/>
               </a:tblGrid>
-              <a:tr h="617220">
+              <a:tr h="623098">
                 <a:tc>
                   <a:txBody>
                     <a:bodyPr/>
@@ -6354,7 +6354,7 @@
                   </a:tcPr>
                 </a:tc>
               </a:tr>
-              <a:tr h="617220">
+              <a:tr h="623098">
                 <a:tc>
                   <a:txBody>
                     <a:bodyPr/>
@@ -6444,7 +6444,7 @@
                   </a:tcPr>
                 </a:tc>
               </a:tr>
-              <a:tr h="617220">
+              <a:tr h="623098">
                 <a:tc>
                   <a:txBody>
                     <a:bodyPr/>
@@ -6534,7 +6534,7 @@
                   </a:tcPr>
                 </a:tc>
               </a:tr>
-              <a:tr h="617220">
+              <a:tr h="623098">
                 <a:tc>
                   <a:txBody>
                     <a:bodyPr/>
@@ -6624,7 +6624,7 @@
                   </a:tcPr>
                 </a:tc>
               </a:tr>
-              <a:tr h="617220">
+              <a:tr h="623098">
                 <a:tc>
                   <a:txBody>
                     <a:bodyPr/>
@@ -6659,7 +6659,7 @@
                           </a:solidFill>
                           <a:latin typeface="Segoe UI"/>
                         </a:rPr>
-                        <a:t>Confirm the auth library and any .NET Framework uplift plan</a:t>
+                        <a:t>Provide UI-topology and BFF-boundary evidence</a:t>
                       </a:r>
                     </a:p>
                   </a:txBody>
@@ -6703,7 +6703,7 @@
                           </a:solidFill>
                           <a:latin typeface="Segoe UI"/>
                         </a:rPr>
-                        <a:t>Q13</a:t>
+                        <a:t>Q15</a:t>
                       </a:r>
                     </a:p>
                   </a:txBody>
@@ -6714,7 +6714,7 @@
                   </a:tcPr>
                 </a:tc>
               </a:tr>
-              <a:tr h="617220">
+              <a:tr h="623098">
                 <a:tc>
                   <a:txBody>
                     <a:bodyPr/>
@@ -6749,7 +6749,7 @@
                           </a:solidFill>
                           <a:latin typeface="Segoe UI"/>
                         </a:rPr>
-                        <a:t>Assess routing Entra calls over the existing site-to-site VPN</a:t>
+                        <a:t>Confirm the auth library and any .NET Framework uplift plan</a:t>
                       </a:r>
                     </a:p>
                   </a:txBody>
@@ -6771,7 +6771,7 @@
                           </a:solidFill>
                           <a:latin typeface="Segoe UI"/>
                         </a:rPr>
-                        <a:t>Joint</a:t>
+                        <a:t>Croesus</a:t>
                       </a:r>
                     </a:p>
                   </a:txBody>
@@ -6793,13 +6793,103 @@
                           </a:solidFill>
                           <a:latin typeface="Segoe UI"/>
                         </a:rPr>
+                        <a:t>Q13</a:t>
+                      </a:r>
+                    </a:p>
+                  </a:txBody>
+                  <a:tcPr anchor="ctr">
+                    <a:solidFill>
+                      <a:srgbClr val="FFFFFF"/>
+                    </a:solidFill>
+                  </a:tcPr>
+                </a:tc>
+              </a:tr>
+              <a:tr h="623100">
+                <a:tc>
+                  <a:txBody>
+                    <a:bodyPr/>
+                    <a:lstStyle/>
+                    <a:p>
+                      <a:r>
+                        <a:rPr sz="1300">
+                          <a:solidFill>
+                            <a:srgbClr val="1A1A1A"/>
+                          </a:solidFill>
+                          <a:latin typeface="Segoe UI"/>
+                        </a:rPr>
+                        <a:t>6</a:t>
+                      </a:r>
+                    </a:p>
+                  </a:txBody>
+                  <a:tcPr anchor="ctr">
+                    <a:solidFill>
+                      <a:srgbClr val="F2F6FA"/>
+                    </a:solidFill>
+                  </a:tcPr>
+                </a:tc>
+                <a:tc>
+                  <a:txBody>
+                    <a:bodyPr/>
+                    <a:lstStyle/>
+                    <a:p>
+                      <a:r>
+                        <a:rPr sz="1300">
+                          <a:solidFill>
+                            <a:srgbClr val="1A1A1A"/>
+                          </a:solidFill>
+                          <a:latin typeface="Segoe UI"/>
+                        </a:rPr>
+                        <a:t>Assess routing Entra calls over the existing site-to-site VPN</a:t>
+                      </a:r>
+                    </a:p>
+                  </a:txBody>
+                  <a:tcPr anchor="ctr">
+                    <a:solidFill>
+                      <a:srgbClr val="F2F6FA"/>
+                    </a:solidFill>
+                  </a:tcPr>
+                </a:tc>
+                <a:tc>
+                  <a:txBody>
+                    <a:bodyPr/>
+                    <a:lstStyle/>
+                    <a:p>
+                      <a:r>
+                        <a:rPr sz="1300">
+                          <a:solidFill>
+                            <a:srgbClr val="1A1A1A"/>
+                          </a:solidFill>
+                          <a:latin typeface="Segoe UI"/>
+                        </a:rPr>
+                        <a:t>Joint</a:t>
+                      </a:r>
+                    </a:p>
+                  </a:txBody>
+                  <a:tcPr anchor="ctr">
+                    <a:solidFill>
+                      <a:srgbClr val="F2F6FA"/>
+                    </a:solidFill>
+                  </a:tcPr>
+                </a:tc>
+                <a:tc>
+                  <a:txBody>
+                    <a:bodyPr/>
+                    <a:lstStyle/>
+                    <a:p>
+                      <a:r>
+                        <a:rPr sz="1300">
+                          <a:solidFill>
+                            <a:srgbClr val="1A1A1A"/>
+                          </a:solidFill>
+                          <a:latin typeface="Segoe UI"/>
+                        </a:rPr>
                         <a:t>Q12 — fastest unblock</a:t>
                       </a:r>
                     </a:p>
                   </a:txBody>
                   <a:tcPr anchor="ctr">
                     <a:solidFill>
-                      <a:srgbClr val="FFFFFF"/>
+                      <a:srgbClr val="F2F6FA"/>
                     </a:solidFill>
                   </a:tcPr>
                 </a:tc>
@@ -7010,7 +7100,7 @@
                 <a:latin typeface="Segoe UI"/>
                 <a:hlinkClick r:id="rId2"/>
               </a:rPr>
-              <a:t>▶  Session findings and all eight routes — START HERE</a:t>
+              <a:t>▶  Session findings and all nine routes — START HERE</a:t>
             </a:r>
           </a:p>
         </p:txBody>
@@ -7042,7 +7132,7 @@
                 <a:latin typeface="Segoe UI"/>
                 <a:hlinkClick r:id="rId3"/>
               </a:rPr>
-              <a:t>▶  Routes and workarounds (R1–R8)</a:t>
+              <a:t>▶  Routes and workarounds (R1–R9)</a:t>
             </a:r>
           </a:p>
         </p:txBody>
@@ -7074,7 +7164,7 @@
                 <a:latin typeface="Segoe UI"/>
                 <a:hlinkClick r:id="rId4"/>
               </a:rPr>
-              <a:t>▶  Question list Q1–Q14 (escalation packet)</a:t>
+              <a:t>▶  Question list Q1–Q15 (escalation packet)</a:t>
             </a:r>
           </a:p>
         </p:txBody>
@@ -7821,7 +7911,7 @@
                 </a:solidFill>
                 <a:latin typeface="Segoe UI"/>
               </a:rPr>
-              <a:t>Central is a </a:t>
+              <a:t>Central’s UI topology is </a:t>
             </a:r>
             <a:r>
               <a:rPr sz="1700" b="1">
@@ -7830,7 +7920,7 @@
                 </a:solidFill>
                 <a:latin typeface="Segoe UI"/>
               </a:rPr>
-              <a:t>server-rendered multi-page application</a:t>
+              <a:t>unresolved</a:t>
             </a:r>
             <a:r>
               <a:rPr sz="1700" b="0">
@@ -7839,7 +7929,7 @@
                 </a:solidFill>
                 <a:latin typeface="Segoe UI"/>
               </a:rPr>
-              <a:t> — ~130 .aspx pages on .NET Framework 4.5.2. Vendor-confirmed. It is not a browser SPA.</a:t>
+              <a:t>: SPA, multi-page Web Forms, and hybrid all remain possible. One URL, .aspx paths, and PKCE do not classify it.</a:t>
             </a:r>
           </a:p>
           <a:p>
@@ -7858,31 +7948,22 @@
               <a:t>▪  </a:t>
             </a:r>
             <a:r>
+              <a:rPr sz="1700" b="1">
+                <a:solidFill>
+                  <a:srgbClr val="1A1A1A"/>
+                </a:solidFill>
+                <a:latin typeface="Segoe UI"/>
+              </a:rPr>
+              <a:t>SPA and BFF are compatible. </a:t>
+            </a:r>
+            <a:r>
               <a:rPr sz="1700" b="0">
                 <a:solidFill>
                   <a:srgbClr val="1A1A1A"/>
                 </a:solidFill>
                 <a:latin typeface="Segoe UI"/>
               </a:rPr>
-              <a:t>So the ‘spa’ platform on the three registrations is a </a:t>
-            </a:r>
-            <a:r>
-              <a:rPr sz="1700" b="1">
-                <a:solidFill>
-                  <a:srgbClr val="1A1A1A"/>
-                </a:solidFill>
-                <a:latin typeface="Segoe UI"/>
-              </a:rPr>
-              <a:t>type mismatch</a:t>
-            </a:r>
-            <a:r>
-              <a:rPr sz="1700" b="0">
-                <a:solidFill>
-                  <a:srgbClr val="1A1A1A"/>
-                </a:solidFill>
-                <a:latin typeface="Segoe UI"/>
-              </a:rPr>
-              <a:t>, not a description. Central is already a Backend-for-Frontend; ‘web’ is the platform that says so.</a:t>
+              <a:t>Treat the BFF label as provisional until Q15 confirms token custody, cookie properties, and backend mediation.</a:t>
             </a:r>
           </a:p>
           <a:p>
@@ -7907,7 +7988,7 @@
                 </a:solidFill>
                 <a:latin typeface="Segoe UI"/>
               </a:rPr>
-              <a:t>Central works in Prod, so the server-side redemption is </a:t>
+              <a:t>Registration type follows the </a:t>
             </a:r>
             <a:r>
               <a:rPr sz="1700" b="1">
@@ -7916,7 +7997,7 @@
                 </a:solidFill>
                 <a:latin typeface="Segoe UI"/>
               </a:rPr>
-              <a:t>succeeding</a:t>
+              <a:t>code redeemer</a:t>
             </a:r>
             <a:r>
               <a:rPr sz="1700" b="0">
@@ -7925,16 +8006,7 @@
                 </a:solidFill>
                 <a:latin typeface="Segoe UI"/>
               </a:rPr>
-              <a:t> against registrations Entra should reject. Only two explanations survive — a synthesised Origin header, or an undisclosed ‘web’ registration. </a:t>
-            </a:r>
-            <a:r>
-              <a:rPr sz="1700" b="1">
-                <a:solidFill>
-                  <a:srgbClr val="1A1A1A"/>
-                </a:solidFill>
-                <a:latin typeface="Segoe UI"/>
-              </a:rPr>
-              <a:t>Q8 is the primary ask.</a:t>
+              <a:t>. If the same backend redeems and retains tokens, it is a confidential ‘web’ client. A separate browser public client may legitimately remain ‘spa’.</a:t>
             </a:r>
           </a:p>
           <a:p>
@@ -9093,7 +9165,7 @@
                 </a:solidFill>
                 <a:latin typeface="Segoe UI"/>
               </a:rPr>
-              <a:t>Conclusion: the redemption is server-side. This corroborates Olivier's account and rules out browser redemption for this capture.</a:t>
+              <a:t>Conclusion: /token did not occur in this sampled browser transaction. That is consistent with Olivier's account, but does not independently identify the redeemer.</a:t>
             </a:r>
           </a:p>
         </p:txBody>
@@ -9128,7 +9200,7 @@
                 </a:solidFill>
                 <a:latin typeface="Segoe UI"/>
               </a:rPr>
-              <a:t>Consequence: Desjardins can no longer observe the Origin header — it now exists only on Croesus's outbound request. Caveat: one sample, one environment.</a:t>
+              <a:t>Consequence: this HAR cannot classify the UI or prove the BFF boundary. Q7, Q8, and Q15 request the missing evidence. Caveat: one sample, one environment.</a:t>
             </a:r>
           </a:p>
         </p:txBody>
@@ -9189,7 +9261,7 @@
                 </a:solidFill>
                 <a:latin typeface="Segoe UI"/>
               </a:rPr>
-              <a:t>WHAT FOLLOWS FROM IT</a:t>
+              <a:t>IF BACKEND REDEMPTION IS CONFIRMED</a:t>
             </a:r>
           </a:p>
         </p:txBody>
@@ -9224,7 +9296,7 @@
                 </a:solidFill>
                 <a:latin typeface="Segoe UI"/>
               </a:rPr>
-              <a:t>The type mismatch, and the two explanations left</a:t>
+              <a:t>The two explanations left</a:t>
             </a:r>
           </a:p>
         </p:txBody>
@@ -9303,7 +9375,7 @@
                 </a:solidFill>
                 <a:latin typeface="Segoe UI"/>
               </a:rPr>
-              <a:t>Entra rejects a plain server-side redemption of a ‘spa’ authorization code with AADSTS9002327. Central works in Prod, so the redemption is succeeding. Exactly two explanations survive.</a:t>
+              <a:t>Entra rejects a plain server-side redemption of a ‘spa’ authorization code with AADSTS9002327. Central works in Prod, so the same backend redeems and retains tokens, Prod success leaves two explanations.</a:t>
             </a:r>
           </a:p>
         </p:txBody>
@@ -10019,7 +10091,7 @@
                           </a:solidFill>
                           <a:latin typeface="Segoe UI"/>
                         </a:rPr>
-                        <a:t>A server-rendered web app / BFF</a:t>
+                        <a:t>A confidential server client</a:t>
                       </a:r>
                     </a:p>
                   </a:txBody>
@@ -10315,7 +10387,7 @@
                           </a:solidFill>
                           <a:latin typeface="Segoe UI"/>
                         </a:rPr>
-                        <a:t>What Central actually is</a:t>
+                        <a:t>Decision evidence</a:t>
                       </a:r>
                     </a:p>
                   </a:txBody>
@@ -10337,7 +10409,7 @@
                           </a:solidFill>
                           <a:latin typeface="Segoe UI"/>
                         </a:rPr>
-                        <a:t>Not this</a:t>
+                        <a:t>Browser redeems and holds tokens</a:t>
                       </a:r>
                     </a:p>
                   </a:txBody>
@@ -10359,7 +10431,7 @@
                           </a:solidFill>
                           <a:latin typeface="Segoe UI"/>
                         </a:rPr>
-                        <a:t>This — ~130 .aspx pages</a:t>
+                        <a:t>Backend redeems and holds tokens</a:t>
                       </a:r>
                     </a:p>
                   </a:txBody>
@@ -10500,7 +10572,7 @@
                 </a:solidFill>
                 <a:latin typeface="Segoe UI"/>
               </a:rPr>
-              <a:t>The same mismatch, live in the demo</a:t>
+              <a:t>The same architecture fork, live in the demo</a:t>
             </a:r>
           </a:p>
         </p:txBody>
